--- a/ARCOS_Presentation.pptx
+++ b/ARCOS_Presentation.pptx
@@ -1871,45 +1871,6 @@
       </p:sp>
       <p:sp>
         <p:nvSpPr>
-          <p:cNvPr id="5" name="Text 3"/>
-          <p:cNvSpPr/>
-          <p:nvPr/>
-        </p:nvSpPr>
-        <p:spPr>
-          <a:xfrm>
-            <a:off x="457200" y="914400"/>
-            <a:ext cx="5303520" cy="1097280"/>
-          </a:xfrm>
-          <a:prstGeom prst="rect">
-            <a:avLst/>
-          </a:prstGeom>
-          <a:noFill/>
-          <a:ln/>
-        </p:spPr>
-        <p:txBody>
-          <a:bodyPr wrap="square" lIns="0" tIns="0" rIns="0" bIns="0" rtlCol="0" anchor="ctr"/>
-          <a:lstStyle/>
-          <a:p>
-            <a:pPr marL="0" indent="0">
-              <a:buNone/>
-            </a:pPr>
-            <a:r>
-              <a:rPr lang="en-US" sz="7200" b="1" dirty="0">
-                <a:solidFill>
-                  <a:srgbClr val="FFFFFF"/>
-                </a:solidFill>
-                <a:latin typeface="Cambria" pitchFamily="34" charset="0"/>
-                <a:ea typeface="Cambria" pitchFamily="34" charset="-122"/>
-                <a:cs typeface="Cambria" pitchFamily="34" charset="-120"/>
-              </a:rPr>
-              <a:t>ARCOS</a:t>
-            </a:r>
-            <a:endParaRPr lang="en-US" sz="7200" dirty="0"/>
-          </a:p>
-        </p:txBody>
-      </p:sp>
-      <p:sp>
-        <p:nvSpPr>
           <p:cNvPr id="6" name="Text 4"/>
           <p:cNvSpPr/>
           <p:nvPr/>
@@ -1941,7 +1902,7 @@
                 <a:ea typeface="Calibri" pitchFamily="34" charset="-122"/>
                 <a:cs typeface="Calibri" pitchFamily="34" charset="-120"/>
               </a:rPr>
-              <a:t>Architecture Réseau et</a:t>
+              <a:t>Architecture Réseau &amp;</a:t>
             </a:r>
             <a:endParaRPr lang="en-US" sz="2000" dirty="0"/>
           </a:p>
@@ -1989,6 +1950,17 @@
               <a:buNone/>
             </a:pPr>
             <a:r>
+              <a:rPr lang="en-US" sz="1300" i="1" dirty="0" err="1">
+                <a:solidFill>
+                  <a:srgbClr val="90A4AE"/>
+                </a:solidFill>
+                <a:latin typeface="Calibri" pitchFamily="34" charset="0"/>
+                <a:ea typeface="Calibri" pitchFamily="34" charset="-122"/>
+                <a:cs typeface="Calibri" pitchFamily="34" charset="-120"/>
+              </a:rPr>
+              <a:t>Projet</a:t>
+            </a:r>
+            <a:r>
               <a:rPr lang="en-US" sz="1300" i="1" dirty="0">
                 <a:solidFill>
                   <a:srgbClr val="90A4AE"/>
@@ -1997,9 +1969,8 @@
                 <a:ea typeface="Calibri" pitchFamily="34" charset="-122"/>
                 <a:cs typeface="Calibri" pitchFamily="34" charset="-120"/>
               </a:rPr>
-              <a:t>Mise en place d'une solution de sécurité réseau</a:t>
-            </a:r>
-            <a:endParaRPr lang="en-US" sz="1300" dirty="0"/>
+              <a:t> OSSI : Mise en place d'une solution de sécurité </a:t>
+            </a:r>
           </a:p>
           <a:p>
             <a:pPr marL="0" indent="0">
@@ -2014,9 +1985,23 @@
                 <a:ea typeface="Calibri" pitchFamily="34" charset="-122"/>
                 <a:cs typeface="Calibri" pitchFamily="34" charset="-120"/>
               </a:rPr>
+              <a:t>Réseau</a:t>
+            </a:r>
+            <a:r>
+              <a:rPr lang="en-US" sz="1300" dirty="0"/>
+              <a:t> </a:t>
+            </a:r>
+            <a:r>
+              <a:rPr lang="en-US" sz="1300" i="1" dirty="0">
+                <a:solidFill>
+                  <a:srgbClr val="90A4AE"/>
+                </a:solidFill>
+                <a:latin typeface="Calibri" pitchFamily="34" charset="0"/>
+                <a:ea typeface="Calibri" pitchFamily="34" charset="-122"/>
+                <a:cs typeface="Calibri" pitchFamily="34" charset="-120"/>
+              </a:rPr>
               <a:t>pour une PME à base de produits open source</a:t>
             </a:r>
-            <a:endParaRPr lang="en-US" sz="1300" dirty="0"/>
           </a:p>
         </p:txBody>
       </p:sp>
@@ -2301,14 +2286,46 @@
         </p:nvPicPr>
         <p:blipFill>
           <a:blip r:embed="rId4"/>
+          <a:srcRect b="20341"/>
           <a:stretch>
             <a:fillRect/>
           </a:stretch>
         </p:blipFill>
         <p:spPr>
           <a:xfrm>
-            <a:off x="6438036" y="2971800"/>
-            <a:ext cx="2248764" cy="1848802"/>
+            <a:off x="4015653" y="2410043"/>
+            <a:ext cx="3936855" cy="2578286"/>
+          </a:xfrm>
+          <a:prstGeom prst="rect">
+            <a:avLst/>
+          </a:prstGeom>
+        </p:spPr>
+      </p:pic>
+      <p:pic>
+        <p:nvPicPr>
+          <p:cNvPr id="4" name="Image 3">
+            <a:extLst>
+              <a:ext uri="{FF2B5EF4-FFF2-40B4-BE49-F238E27FC236}">
+                <a16:creationId xmlns:a16="http://schemas.microsoft.com/office/drawing/2014/main" id="{FCEE8D09-95EB-AA76-D3C2-72BAA2FD6937}"/>
+              </a:ext>
+            </a:extLst>
+          </p:cNvPr>
+          <p:cNvPicPr>
+            <a:picLocks noChangeAspect="1"/>
+          </p:cNvPicPr>
+          <p:nvPr/>
+        </p:nvPicPr>
+        <p:blipFill>
+          <a:blip r:embed="rId4"/>
+          <a:srcRect t="77276"/>
+          <a:stretch>
+            <a:fillRect/>
+          </a:stretch>
+        </p:blipFill>
+        <p:spPr>
+          <a:xfrm>
+            <a:off x="274320" y="1020176"/>
+            <a:ext cx="5062451" cy="945783"/>
           </a:xfrm>
           <a:prstGeom prst="rect">
             <a:avLst/>
@@ -3273,6 +3290,56 @@
           </a:p>
         </p:txBody>
       </p:sp>
+      <p:pic>
+        <p:nvPicPr>
+          <p:cNvPr id="3" name="Image 2">
+            <a:extLst>
+              <a:ext uri="{FF2B5EF4-FFF2-40B4-BE49-F238E27FC236}">
+                <a16:creationId xmlns:a16="http://schemas.microsoft.com/office/drawing/2014/main" id="{90BBAD30-0CF2-F905-6B17-D4D278089ECC}"/>
+              </a:ext>
+            </a:extLst>
+          </p:cNvPr>
+          <p:cNvPicPr>
+            <a:picLocks noChangeAspect="1"/>
+          </p:cNvPicPr>
+          <p:nvPr/>
+        </p:nvPicPr>
+        <p:blipFill>
+          <a:blip r:embed="rId3">
+            <a:duotone>
+              <a:prstClr val="black"/>
+              <a:schemeClr val="tx1">
+                <a:tint val="45000"/>
+                <a:satMod val="400000"/>
+              </a:schemeClr>
+            </a:duotone>
+            <a:extLst>
+              <a:ext uri="{BEBA8EAE-BF5A-486C-A8C5-ECC9F3942E4B}">
+                <a14:imgProps xmlns:a14="http://schemas.microsoft.com/office/drawing/2010/main">
+                  <a14:imgLayer r:embed="rId4">
+                    <a14:imgEffect>
+                      <a14:brightnessContrast bright="2000"/>
+                    </a14:imgEffect>
+                  </a14:imgLayer>
+                </a14:imgProps>
+              </a:ext>
+            </a:extLst>
+          </a:blip>
+          <a:srcRect t="76759"/>
+          <a:stretch>
+            <a:fillRect/>
+          </a:stretch>
+        </p:blipFill>
+        <p:spPr>
+          <a:xfrm>
+            <a:off x="7340011" y="182880"/>
+            <a:ext cx="1605869" cy="306835"/>
+          </a:xfrm>
+          <a:prstGeom prst="rect">
+            <a:avLst/>
+          </a:prstGeom>
+        </p:spPr>
+      </p:pic>
     </p:spTree>
   </p:cSld>
   <p:clrMapOvr>
@@ -3339,7 +3406,7 @@
                 <a:ea typeface="Cambria" pitchFamily="34" charset="-122"/>
                 <a:cs typeface="Cambria" pitchFamily="34" charset="-120"/>
               </a:rPr>
-              <a:t>05/06 — DEMO </a:t>
+              <a:t>05 — DEMO </a:t>
             </a:r>
             <a:r>
               <a:rPr lang="en-US" sz="2600" b="1" dirty="0" err="1">
@@ -3433,7 +3500,7 @@
               <a:buNone/>
             </a:pPr>
             <a:r>
-              <a:rPr lang="en-US" sz="1300" b="1" dirty="0">
+              <a:rPr lang="en-US" sz="1300" b="1" dirty="0" err="1">
                 <a:solidFill>
                   <a:srgbClr val="1E2761"/>
                 </a:solidFill>
@@ -3441,7 +3508,18 @@
                 <a:ea typeface="Cambria" pitchFamily="34" charset="-122"/>
                 <a:cs typeface="Cambria" pitchFamily="34" charset="-120"/>
               </a:rPr>
-              <a:t>📊 ntopng — Supervision temps réel</a:t>
+              <a:t>ntopng</a:t>
+            </a:r>
+            <a:r>
+              <a:rPr lang="en-US" sz="1300" b="1" dirty="0">
+                <a:solidFill>
+                  <a:srgbClr val="1E2761"/>
+                </a:solidFill>
+                <a:latin typeface="Cambria" pitchFamily="34" charset="0"/>
+                <a:ea typeface="Cambria" pitchFamily="34" charset="-122"/>
+                <a:cs typeface="Cambria" pitchFamily="34" charset="-120"/>
+              </a:rPr>
+              <a:t> — Supervision temps réel</a:t>
             </a:r>
             <a:endParaRPr lang="en-US" sz="1300" dirty="0"/>
           </a:p>
@@ -3713,7 +3791,7 @@
                 <a:ea typeface="Cambria" pitchFamily="34" charset="-122"/>
                 <a:cs typeface="Cambria" pitchFamily="34" charset="-120"/>
               </a:rPr>
-              <a:t>⚡ Traffic Shaping (QoS)</a:t>
+              <a:t>Traffic Shaping (QoS)</a:t>
             </a:r>
             <a:endParaRPr lang="en-US" sz="1300" dirty="0"/>
           </a:p>
@@ -4356,7 +4434,7 @@
                 <a:ea typeface="Calibri" pitchFamily="34" charset="-122"/>
                 <a:cs typeface="Calibri" pitchFamily="34" charset="-120"/>
               </a:rPr>
-              <a:t>🔍 Squid + SquidGuard :</a:t>
+              <a:t>Squid + SquidGuard :</a:t>
             </a:r>
             <a:endParaRPr lang="en-US" sz="1100" dirty="0"/>
           </a:p>
@@ -4426,6 +4504,17 @@
               <a:buNone/>
             </a:pPr>
             <a:r>
+              <a:rPr lang="en-US" sz="1100" b="1" dirty="0" err="1">
+                <a:solidFill>
+                  <a:srgbClr val="1E2761"/>
+                </a:solidFill>
+                <a:latin typeface="Calibri" pitchFamily="34" charset="0"/>
+                <a:ea typeface="Calibri" pitchFamily="34" charset="-122"/>
+                <a:cs typeface="Calibri" pitchFamily="34" charset="-120"/>
+              </a:rPr>
+              <a:t>Portail</a:t>
+            </a:r>
+            <a:r>
               <a:rPr lang="en-US" sz="1100" b="1" dirty="0">
                 <a:solidFill>
                   <a:srgbClr val="1E2761"/>
@@ -4434,7 +4523,7 @@
                 <a:ea typeface="Calibri" pitchFamily="34" charset="-122"/>
                 <a:cs typeface="Calibri" pitchFamily="34" charset="-120"/>
               </a:rPr>
-              <a:t>🚪 Portail Captif :</a:t>
+              <a:t> Captif :</a:t>
             </a:r>
             <a:endParaRPr lang="en-US" sz="1100" dirty="0"/>
           </a:p>
@@ -4545,7 +4634,7 @@
                 <a:ea typeface="Cambria" pitchFamily="34" charset="-122"/>
                 <a:cs typeface="Cambria" pitchFamily="34" charset="-120"/>
               </a:rPr>
-              <a:t>Plan de Tests — Résultats</a:t>
+              <a:t>06 - Plan de Tests — Résultats</a:t>
             </a:r>
             <a:endParaRPr lang="en-US" sz="3000" dirty="0"/>
           </a:p>
@@ -4694,7 +4783,7 @@
                 <a:ea typeface="Calibri" pitchFamily="34" charset="-122"/>
                 <a:cs typeface="Calibri" pitchFamily="34" charset="-120"/>
               </a:rPr>
-              <a:t>✅ 0% perte, 2ms</a:t>
+              <a:t>0% perte, 2ms</a:t>
             </a:r>
             <a:endParaRPr lang="en-US" sz="900" dirty="0"/>
           </a:p>
@@ -4843,7 +4932,7 @@
                 <a:ea typeface="Calibri" pitchFamily="34" charset="-122"/>
                 <a:cs typeface="Calibri" pitchFamily="34" charset="-120"/>
               </a:rPr>
-              <a:t>✅ 0% perte, 8ms</a:t>
+              <a:t>0% perte, 8ms</a:t>
             </a:r>
             <a:endParaRPr lang="en-US" sz="900" dirty="0"/>
           </a:p>
@@ -4992,7 +5081,7 @@
                 <a:ea typeface="Calibri" pitchFamily="34" charset="-122"/>
                 <a:cs typeface="Calibri" pitchFamily="34" charset="-120"/>
               </a:rPr>
-              <a:t>✅ IPs attribuées auto</a:t>
+              <a:t>IPs attribuées auto</a:t>
             </a:r>
             <a:endParaRPr lang="en-US" sz="900" dirty="0"/>
           </a:p>
@@ -5141,7 +5230,7 @@
                 <a:ea typeface="Calibri" pitchFamily="34" charset="-122"/>
                 <a:cs typeface="Calibri" pitchFamily="34" charset="-120"/>
               </a:rPr>
-              <a:t>✅ TLS chiffré port 853</a:t>
+              <a:t>TLS chiffré port 853</a:t>
             </a:r>
             <a:endParaRPr lang="en-US" sz="900" dirty="0"/>
           </a:p>
@@ -5282,6 +5371,17 @@
               <a:buNone/>
             </a:pPr>
             <a:r>
+              <a:rPr lang="en-US" sz="900" b="1" dirty="0" err="1">
+                <a:solidFill>
+                  <a:srgbClr val="4CAF50"/>
+                </a:solidFill>
+                <a:latin typeface="Calibri" pitchFamily="34" charset="0"/>
+                <a:ea typeface="Calibri" pitchFamily="34" charset="-122"/>
+                <a:cs typeface="Calibri" pitchFamily="34" charset="-120"/>
+              </a:rPr>
+              <a:t>Règles</a:t>
+            </a:r>
+            <a:r>
               <a:rPr lang="en-US" sz="900" b="1" dirty="0">
                 <a:solidFill>
                   <a:srgbClr val="4CAF50"/>
@@ -5290,7 +5390,7 @@
                 <a:ea typeface="Calibri" pitchFamily="34" charset="-122"/>
                 <a:cs typeface="Calibri" pitchFamily="34" charset="-120"/>
               </a:rPr>
-              <a:t>✅ Règles fonctionnelles</a:t>
+              <a:t> fonctionnelles</a:t>
             </a:r>
             <a:endParaRPr lang="en-US" sz="900" dirty="0"/>
           </a:p>
@@ -5431,6 +5531,17 @@
               <a:buNone/>
             </a:pPr>
             <a:r>
+              <a:rPr lang="en-US" sz="900" b="1" dirty="0" err="1">
+                <a:solidFill>
+                  <a:srgbClr val="4CAF50"/>
+                </a:solidFill>
+                <a:latin typeface="Calibri" pitchFamily="34" charset="0"/>
+                <a:ea typeface="Calibri" pitchFamily="34" charset="-122"/>
+                <a:cs typeface="Calibri" pitchFamily="34" charset="-120"/>
+              </a:rPr>
+              <a:t>Alertes</a:t>
+            </a:r>
+            <a:r>
               <a:rPr lang="en-US" sz="900" b="1" dirty="0">
                 <a:solidFill>
                   <a:srgbClr val="4CAF50"/>
@@ -5439,7 +5550,7 @@
                 <a:ea typeface="Calibri" pitchFamily="34" charset="-122"/>
                 <a:cs typeface="Calibri" pitchFamily="34" charset="-120"/>
               </a:rPr>
-              <a:t>✅ Alertes générées</a:t>
+              <a:t> générées</a:t>
             </a:r>
             <a:endParaRPr lang="en-US" sz="900" dirty="0"/>
           </a:p>
@@ -5588,7 +5699,7 @@
                 <a:ea typeface="Calibri" pitchFamily="34" charset="-122"/>
                 <a:cs typeface="Calibri" pitchFamily="34" charset="-120"/>
               </a:rPr>
-              <a:t>✅ 26Kbps visibles</a:t>
+              <a:t>26Kbps visibles</a:t>
             </a:r>
             <a:endParaRPr lang="en-US" sz="900" dirty="0"/>
           </a:p>
@@ -5737,7 +5848,7 @@
                 <a:ea typeface="Calibri" pitchFamily="34" charset="-122"/>
                 <a:cs typeface="Calibri" pitchFamily="34" charset="-120"/>
               </a:rPr>
-              <a:t>✅ Page bloquée</a:t>
+              <a:t>Page bloquée</a:t>
             </a:r>
             <a:endParaRPr lang="en-US" sz="900" dirty="0"/>
           </a:p>
@@ -5886,7 +5997,7 @@
                 <a:ea typeface="Calibri" pitchFamily="34" charset="-122"/>
                 <a:cs typeface="Calibri" pitchFamily="34" charset="-120"/>
               </a:rPr>
-              <a:t>✅ Redirection login</a:t>
+              <a:t> Redirection login</a:t>
             </a:r>
             <a:endParaRPr lang="en-US" sz="900" dirty="0"/>
           </a:p>
@@ -6027,6 +6138,17 @@
               <a:buNone/>
             </a:pPr>
             <a:r>
+              <a:rPr lang="en-US" sz="900" b="1" dirty="0" err="1">
+                <a:solidFill>
+                  <a:srgbClr val="4CAF50"/>
+                </a:solidFill>
+                <a:latin typeface="Calibri" pitchFamily="34" charset="0"/>
+                <a:ea typeface="Calibri" pitchFamily="34" charset="-122"/>
+                <a:cs typeface="Calibri" pitchFamily="34" charset="-120"/>
+              </a:rPr>
+              <a:t>Actif</a:t>
+            </a:r>
+            <a:r>
               <a:rPr lang="en-US" sz="900" b="1" dirty="0">
                 <a:solidFill>
                   <a:srgbClr val="4CAF50"/>
@@ -6035,7 +6157,7 @@
                 <a:ea typeface="Calibri" pitchFamily="34" charset="-122"/>
                 <a:cs typeface="Calibri" pitchFamily="34" charset="-120"/>
               </a:rPr>
-              <a:t>✅ Actif 203.0.113.1:1194</a:t>
+              <a:t> 203.0.113.1:1194</a:t>
             </a:r>
             <a:endParaRPr lang="en-US" sz="900" dirty="0"/>
           </a:p>
@@ -6176,6 +6298,17 @@
               <a:buNone/>
             </a:pPr>
             <a:r>
+              <a:rPr lang="en-US" sz="900" b="1" dirty="0" err="1">
+                <a:solidFill>
+                  <a:srgbClr val="FF9800"/>
+                </a:solidFill>
+                <a:latin typeface="Calibri" pitchFamily="34" charset="0"/>
+                <a:ea typeface="Calibri" pitchFamily="34" charset="-122"/>
+                <a:cs typeface="Calibri" pitchFamily="34" charset="-120"/>
+              </a:rPr>
+              <a:t>Contrainte</a:t>
+            </a:r>
+            <a:r>
               <a:rPr lang="en-US" sz="900" b="1" dirty="0">
                 <a:solidFill>
                   <a:srgbClr val="FF9800"/>
@@ -6184,7 +6317,7 @@
                 <a:ea typeface="Calibri" pitchFamily="34" charset="-122"/>
                 <a:cs typeface="Calibri" pitchFamily="34" charset="-120"/>
               </a:rPr>
-              <a:t>⚠️ Contrainte 4 VM</a:t>
+              <a:t> 4 VM</a:t>
             </a:r>
             <a:endParaRPr lang="en-US" sz="900" dirty="0"/>
           </a:p>
@@ -6325,6 +6458,17 @@
               <a:buNone/>
             </a:pPr>
             <a:r>
+              <a:rPr lang="en-US" sz="900" b="1" dirty="0" err="1">
+                <a:solidFill>
+                  <a:srgbClr val="4CAF50"/>
+                </a:solidFill>
+                <a:latin typeface="Calibri" pitchFamily="34" charset="0"/>
+                <a:ea typeface="Calibri" pitchFamily="34" charset="-122"/>
+                <a:cs typeface="Calibri" pitchFamily="34" charset="-120"/>
+              </a:rPr>
+              <a:t>Débit</a:t>
+            </a:r>
+            <a:r>
               <a:rPr lang="en-US" sz="900" b="1" dirty="0">
                 <a:solidFill>
                   <a:srgbClr val="4CAF50"/>
@@ -6333,12 +6477,62 @@
                 <a:ea typeface="Calibri" pitchFamily="34" charset="-122"/>
                 <a:cs typeface="Calibri" pitchFamily="34" charset="-120"/>
               </a:rPr>
-              <a:t>✅ Débit mesuré</a:t>
+              <a:t> mesuré</a:t>
             </a:r>
             <a:endParaRPr lang="en-US" sz="900" dirty="0"/>
           </a:p>
         </p:txBody>
       </p:sp>
+      <p:pic>
+        <p:nvPicPr>
+          <p:cNvPr id="51" name="Image 50">
+            <a:extLst>
+              <a:ext uri="{FF2B5EF4-FFF2-40B4-BE49-F238E27FC236}">
+                <a16:creationId xmlns:a16="http://schemas.microsoft.com/office/drawing/2014/main" id="{3F61F767-8503-17D1-5973-FF6C1843A8A8}"/>
+              </a:ext>
+            </a:extLst>
+          </p:cNvPr>
+          <p:cNvPicPr>
+            <a:picLocks noChangeAspect="1"/>
+          </p:cNvPicPr>
+          <p:nvPr/>
+        </p:nvPicPr>
+        <p:blipFill>
+          <a:blip r:embed="rId3">
+            <a:duotone>
+              <a:prstClr val="black"/>
+              <a:schemeClr val="tx1">
+                <a:tint val="45000"/>
+                <a:satMod val="400000"/>
+              </a:schemeClr>
+            </a:duotone>
+            <a:extLst>
+              <a:ext uri="{BEBA8EAE-BF5A-486C-A8C5-ECC9F3942E4B}">
+                <a14:imgProps xmlns:a14="http://schemas.microsoft.com/office/drawing/2010/main">
+                  <a14:imgLayer r:embed="rId4">
+                    <a14:imgEffect>
+                      <a14:brightnessContrast bright="-100000" contrast="100000"/>
+                    </a14:imgEffect>
+                  </a14:imgLayer>
+                </a14:imgProps>
+              </a:ext>
+            </a:extLst>
+          </a:blip>
+          <a:srcRect t="76759"/>
+          <a:stretch>
+            <a:fillRect/>
+          </a:stretch>
+        </p:blipFill>
+        <p:spPr>
+          <a:xfrm>
+            <a:off x="7340011" y="182880"/>
+            <a:ext cx="1605869" cy="306835"/>
+          </a:xfrm>
+          <a:prstGeom prst="rect">
+            <a:avLst/>
+          </a:prstGeom>
+        </p:spPr>
+      </p:pic>
     </p:spTree>
   </p:cSld>
   <p:clrMapOvr>
@@ -6478,7 +6672,7 @@
                 <a:ea typeface="Calibri" pitchFamily="34" charset="-122"/>
                 <a:cs typeface="Calibri" pitchFamily="34" charset="-120"/>
               </a:rPr>
-              <a:t>✅ Must Have — 100% couverts</a:t>
+              <a:t>Must Have — 100% couverts</a:t>
             </a:r>
             <a:endParaRPr lang="en-US" sz="1300" dirty="0"/>
           </a:p>
@@ -6785,7 +6979,7 @@
                 <a:ea typeface="Calibri" pitchFamily="34" charset="-122"/>
                 <a:cs typeface="Calibri" pitchFamily="34" charset="-120"/>
               </a:rPr>
-              <a:t>🟡 Should Have — Majoritairement couverts</a:t>
+              <a:t>Should Have — Majoritairement couverts</a:t>
             </a:r>
             <a:endParaRPr lang="en-US" sz="1300" dirty="0"/>
           </a:p>
@@ -7019,7 +7213,7 @@
                 <a:ea typeface="Calibri" pitchFamily="34" charset="-122"/>
                 <a:cs typeface="Calibri" pitchFamily="34" charset="-120"/>
               </a:rPr>
-              <a:t>⚠️ Analyse risque formelle — documentée</a:t>
+              <a:t>     Analyse risque formelle — documentée</a:t>
             </a:r>
             <a:endParaRPr lang="en-US" sz="1000" dirty="0"/>
           </a:p>
@@ -7092,7 +7286,7 @@
                 <a:ea typeface="Calibri" pitchFamily="34" charset="-122"/>
                 <a:cs typeface="Calibri" pitchFamily="34" charset="-120"/>
               </a:rPr>
-              <a:t>🔵 Could Have — Partiellement couverts</a:t>
+              <a:t>Could Have — Partiellement couverts</a:t>
             </a:r>
             <a:endParaRPr lang="en-US" sz="1300" dirty="0"/>
           </a:p>
@@ -7176,45 +7370,56 @@
           </a:p>
         </p:txBody>
       </p:sp>
-      <p:sp>
-        <p:nvSpPr>
-          <p:cNvPr id="23" name="Text 21"/>
-          <p:cNvSpPr/>
-          <p:nvPr/>
-        </p:nvSpPr>
-        <p:spPr>
-          <a:xfrm>
-            <a:off x="6126480" y="4553712"/>
-            <a:ext cx="2651760" cy="301752"/>
-          </a:xfrm>
-          <a:prstGeom prst="rect">
-            <a:avLst/>
-          </a:prstGeom>
-          <a:noFill/>
-          <a:ln/>
-        </p:spPr>
-        <p:txBody>
-          <a:bodyPr wrap="square" lIns="0" tIns="0" rIns="0" bIns="0" rtlCol="0" anchor="ctr"/>
-          <a:lstStyle/>
-          <a:p>
-            <a:pPr marL="0" indent="0">
-              <a:buNone/>
-            </a:pPr>
-            <a:r>
-              <a:rPr lang="en-US" sz="1000" dirty="0">
-                <a:solidFill>
-                  <a:srgbClr val="CADCFC"/>
-                </a:solidFill>
-                <a:latin typeface="Calibri" pitchFamily="34" charset="0"/>
-                <a:ea typeface="Calibri" pitchFamily="34" charset="-122"/>
-                <a:cs typeface="Calibri" pitchFamily="34" charset="-120"/>
-              </a:rPr>
-              <a:t>→ SIEM / LDAP : évolution documentée</a:t>
-            </a:r>
-            <a:endParaRPr lang="en-US" sz="1000" dirty="0"/>
-          </a:p>
-        </p:txBody>
-      </p:sp>
+      <p:pic>
+        <p:nvPicPr>
+          <p:cNvPr id="24" name="Image 23">
+            <a:extLst>
+              <a:ext uri="{FF2B5EF4-FFF2-40B4-BE49-F238E27FC236}">
+                <a16:creationId xmlns:a16="http://schemas.microsoft.com/office/drawing/2014/main" id="{511708DE-16DB-988B-2F22-976B985C31A6}"/>
+              </a:ext>
+            </a:extLst>
+          </p:cNvPr>
+          <p:cNvPicPr>
+            <a:picLocks noChangeAspect="1"/>
+          </p:cNvPicPr>
+          <p:nvPr/>
+        </p:nvPicPr>
+        <p:blipFill>
+          <a:blip r:embed="rId3">
+            <a:duotone>
+              <a:prstClr val="black"/>
+              <a:schemeClr val="tx1">
+                <a:tint val="45000"/>
+                <a:satMod val="400000"/>
+              </a:schemeClr>
+            </a:duotone>
+            <a:extLst>
+              <a:ext uri="{BEBA8EAE-BF5A-486C-A8C5-ECC9F3942E4B}">
+                <a14:imgProps xmlns:a14="http://schemas.microsoft.com/office/drawing/2010/main">
+                  <a14:imgLayer r:embed="rId4">
+                    <a14:imgEffect>
+                      <a14:brightnessContrast bright="-100000" contrast="100000"/>
+                    </a14:imgEffect>
+                  </a14:imgLayer>
+                </a14:imgProps>
+              </a:ext>
+            </a:extLst>
+          </a:blip>
+          <a:srcRect t="76759"/>
+          <a:stretch>
+            <a:fillRect/>
+          </a:stretch>
+        </p:blipFill>
+        <p:spPr>
+          <a:xfrm>
+            <a:off x="7340011" y="182880"/>
+            <a:ext cx="1605869" cy="306835"/>
+          </a:xfrm>
+          <a:prstGeom prst="rect">
+            <a:avLst/>
+          </a:prstGeom>
+        </p:spPr>
+      </p:pic>
     </p:spTree>
   </p:cSld>
   <p:clrMapOvr>
@@ -7377,13 +7582,13 @@
       </p:sp>
       <p:sp>
         <p:nvSpPr>
-          <p:cNvPr id="5" name="Text 3"/>
-          <p:cNvSpPr/>
-          <p:nvPr/>
-        </p:nvSpPr>
-        <p:spPr>
-          <a:xfrm>
-            <a:off x="457200" y="1920240"/>
+          <p:cNvPr id="6" name="Text 4"/>
+          <p:cNvSpPr/>
+          <p:nvPr/>
+        </p:nvSpPr>
+        <p:spPr>
+          <a:xfrm>
+            <a:off x="457200" y="1851660"/>
             <a:ext cx="4754880" cy="411480"/>
           </a:xfrm>
           <a:prstGeom prst="rect">
@@ -7400,7 +7605,7 @@
               <a:buNone/>
             </a:pPr>
             <a:r>
-              <a:rPr lang="en-US" sz="1400" b="1" dirty="0">
+              <a:rPr lang="en-US" sz="1400" dirty="0">
                 <a:solidFill>
                   <a:srgbClr val="FFFFFF"/>
                 </a:solidFill>
@@ -7408,7 +7613,7 @@
                 <a:ea typeface="Calibri" pitchFamily="34" charset="-122"/>
                 <a:cs typeface="Calibri" pitchFamily="34" charset="-120"/>
               </a:rPr>
-              <a:t>✅ 11 / 12 tests validés</a:t>
+              <a:t>✅ 100% open source — zéro licence</a:t>
             </a:r>
             <a:endParaRPr lang="en-US" sz="1400" dirty="0"/>
           </a:p>
@@ -7416,13 +7621,13 @@
       </p:sp>
       <p:sp>
         <p:nvSpPr>
-          <p:cNvPr id="6" name="Text 4"/>
-          <p:cNvSpPr/>
-          <p:nvPr/>
-        </p:nvSpPr>
-        <p:spPr>
-          <a:xfrm>
-            <a:off x="457200" y="2423160"/>
+          <p:cNvPr id="7" name="Text 5"/>
+          <p:cNvSpPr/>
+          <p:nvPr/>
+        </p:nvSpPr>
+        <p:spPr>
+          <a:xfrm>
+            <a:off x="457200" y="2253095"/>
             <a:ext cx="4754880" cy="411480"/>
           </a:xfrm>
           <a:prstGeom prst="rect">
@@ -7447,7 +7652,7 @@
                 <a:ea typeface="Calibri" pitchFamily="34" charset="-122"/>
                 <a:cs typeface="Calibri" pitchFamily="34" charset="-120"/>
               </a:rPr>
-              <a:t>✅ 100% open source — zéro licence</a:t>
+              <a:t>✅ Architecture reproductible (config XML)</a:t>
             </a:r>
             <a:endParaRPr lang="en-US" sz="1400" dirty="0"/>
           </a:p>
@@ -7455,52 +7660,13 @@
       </p:sp>
       <p:sp>
         <p:nvSpPr>
-          <p:cNvPr id="7" name="Text 5"/>
-          <p:cNvSpPr/>
-          <p:nvPr/>
-        </p:nvSpPr>
-        <p:spPr>
-          <a:xfrm>
-            <a:off x="457200" y="2926080"/>
-            <a:ext cx="4754880" cy="411480"/>
-          </a:xfrm>
-          <a:prstGeom prst="rect">
-            <a:avLst/>
-          </a:prstGeom>
-          <a:noFill/>
-          <a:ln/>
-        </p:spPr>
-        <p:txBody>
-          <a:bodyPr wrap="square" lIns="0" tIns="0" rIns="0" bIns="0" rtlCol="0" anchor="ctr"/>
-          <a:lstStyle/>
-          <a:p>
-            <a:pPr marL="0" indent="0">
-              <a:buNone/>
-            </a:pPr>
-            <a:r>
-              <a:rPr lang="en-US" sz="1400" dirty="0">
-                <a:solidFill>
-                  <a:srgbClr val="FFFFFF"/>
-                </a:solidFill>
-                <a:latin typeface="Calibri" pitchFamily="34" charset="0"/>
-                <a:ea typeface="Calibri" pitchFamily="34" charset="-122"/>
-                <a:cs typeface="Calibri" pitchFamily="34" charset="-120"/>
-              </a:rPr>
-              <a:t>✅ Architecture reproductible (config XML)</a:t>
-            </a:r>
-            <a:endParaRPr lang="en-US" sz="1400" dirty="0"/>
-          </a:p>
-        </p:txBody>
-      </p:sp>
-      <p:sp>
-        <p:nvSpPr>
           <p:cNvPr id="8" name="Text 6"/>
           <p:cNvSpPr/>
           <p:nvPr/>
         </p:nvSpPr>
         <p:spPr>
           <a:xfrm>
-            <a:off x="457200" y="3429000"/>
+            <a:off x="457200" y="2674274"/>
             <a:ext cx="4754880" cy="411480"/>
           </a:xfrm>
           <a:prstGeom prst="rect">
@@ -7804,6 +7970,99 @@
           </a:p>
         </p:txBody>
       </p:sp>
+      <p:pic>
+        <p:nvPicPr>
+          <p:cNvPr id="16" name="Image 15">
+            <a:extLst>
+              <a:ext uri="{FF2B5EF4-FFF2-40B4-BE49-F238E27FC236}">
+                <a16:creationId xmlns:a16="http://schemas.microsoft.com/office/drawing/2014/main" id="{ECCD4F4A-B6EA-E21B-44FD-87E2C8985F12}"/>
+              </a:ext>
+            </a:extLst>
+          </p:cNvPr>
+          <p:cNvPicPr>
+            <a:picLocks noChangeAspect="1"/>
+          </p:cNvPicPr>
+          <p:nvPr/>
+        </p:nvPicPr>
+        <p:blipFill>
+          <a:blip r:embed="rId3"/>
+          <a:srcRect b="21206"/>
+          <a:stretch>
+            <a:fillRect/>
+          </a:stretch>
+        </p:blipFill>
+        <p:spPr>
+          <a:xfrm>
+            <a:off x="7492553" y="3846854"/>
+            <a:ext cx="1714856" cy="1110883"/>
+          </a:xfrm>
+          <a:prstGeom prst="rect">
+            <a:avLst/>
+          </a:prstGeom>
+        </p:spPr>
+      </p:pic>
+      <p:pic>
+        <p:nvPicPr>
+          <p:cNvPr id="17" name="Image 16">
+            <a:extLst>
+              <a:ext uri="{FF2B5EF4-FFF2-40B4-BE49-F238E27FC236}">
+                <a16:creationId xmlns:a16="http://schemas.microsoft.com/office/drawing/2014/main" id="{4C1A4DA1-3AC0-4080-CED1-970D38E52AD3}"/>
+              </a:ext>
+            </a:extLst>
+          </p:cNvPr>
+          <p:cNvPicPr>
+            <a:picLocks noChangeAspect="1"/>
+          </p:cNvPicPr>
+          <p:nvPr/>
+        </p:nvPicPr>
+        <p:blipFill>
+          <a:blip r:embed="rId3"/>
+          <a:srcRect t="77601"/>
+          <a:stretch>
+            <a:fillRect/>
+          </a:stretch>
+        </p:blipFill>
+        <p:spPr>
+          <a:xfrm>
+            <a:off x="3546222" y="3977640"/>
+            <a:ext cx="2234435" cy="411480"/>
+          </a:xfrm>
+          <a:prstGeom prst="rect">
+            <a:avLst/>
+          </a:prstGeom>
+        </p:spPr>
+      </p:pic>
+      <p:pic>
+        <p:nvPicPr>
+          <p:cNvPr id="18" name="Image 17" descr="Témoignage client : EFREI | monday.com">
+            <a:extLst>
+              <a:ext uri="{FF2B5EF4-FFF2-40B4-BE49-F238E27FC236}">
+                <a16:creationId xmlns:a16="http://schemas.microsoft.com/office/drawing/2014/main" id="{7AD2061D-760E-8D5D-C058-A1628DA8F7B4}"/>
+              </a:ext>
+            </a:extLst>
+          </p:cNvPr>
+          <p:cNvPicPr>
+            <a:picLocks noChangeAspect="1"/>
+          </p:cNvPicPr>
+          <p:nvPr/>
+        </p:nvPicPr>
+        <p:blipFill>
+          <a:blip r:embed="rId4"/>
+          <a:srcRect r="69576" b="12534"/>
+          <a:stretch>
+            <a:fillRect/>
+          </a:stretch>
+        </p:blipFill>
+        <p:spPr>
+          <a:xfrm>
+            <a:off x="7734519" y="2763915"/>
+            <a:ext cx="1230923" cy="1153664"/>
+          </a:xfrm>
+          <a:prstGeom prst="rect">
+            <a:avLst/>
+          </a:prstGeom>
+        </p:spPr>
+      </p:pic>
     </p:spTree>
   </p:cSld>
   <p:clrMapOvr>
@@ -8144,7 +8403,7 @@
         <p:spPr>
           <a:xfrm>
             <a:off x="457200" y="2103120"/>
-            <a:ext cx="8229600" cy="457200"/>
+            <a:ext cx="4376057" cy="457200"/>
           </a:xfrm>
           <a:prstGeom prst="roundRect">
             <a:avLst>
@@ -8224,7 +8483,7 @@
         <p:spPr>
           <a:xfrm>
             <a:off x="1234440" y="2148840"/>
-            <a:ext cx="5943600" cy="365760"/>
+            <a:ext cx="3563648" cy="365760"/>
           </a:xfrm>
           <a:prstGeom prst="rect">
             <a:avLst/>
@@ -8291,7 +8550,7 @@
         <p:spPr>
           <a:xfrm>
             <a:off x="457200" y="2651760"/>
-            <a:ext cx="8229600" cy="457200"/>
+            <a:ext cx="4376057" cy="457200"/>
           </a:xfrm>
           <a:prstGeom prst="roundRect">
             <a:avLst>
@@ -8364,7 +8623,7 @@
         <p:spPr>
           <a:xfrm>
             <a:off x="1234440" y="2697480"/>
-            <a:ext cx="5943600" cy="365760"/>
+            <a:ext cx="3869368" cy="365760"/>
           </a:xfrm>
           <a:prstGeom prst="rect">
             <a:avLst/>
@@ -8431,7 +8690,7 @@
         <p:spPr>
           <a:xfrm>
             <a:off x="457200" y="3200400"/>
-            <a:ext cx="8229600" cy="457200"/>
+            <a:ext cx="4376057" cy="457200"/>
           </a:xfrm>
           <a:prstGeom prst="roundRect">
             <a:avLst>
@@ -8511,7 +8770,7 @@
         <p:spPr>
           <a:xfrm>
             <a:off x="1234440" y="3246120"/>
-            <a:ext cx="5943600" cy="365760"/>
+            <a:ext cx="3513406" cy="365760"/>
           </a:xfrm>
           <a:prstGeom prst="rect">
             <a:avLst/>
@@ -8675,7 +8934,18 @@
                 <a:ea typeface="Calibri" pitchFamily="34" charset="-122"/>
                 <a:cs typeface="Calibri" pitchFamily="34" charset="-120"/>
               </a:rPr>
-              <a:t>Traffic Shaping</a:t>
+              <a:t>Plan de test &amp; </a:t>
+            </a:r>
+            <a:r>
+              <a:rPr lang="en-US" sz="1400" dirty="0" err="1">
+                <a:solidFill>
+                  <a:srgbClr val="1E2761"/>
+                </a:solidFill>
+                <a:latin typeface="Calibri" pitchFamily="34" charset="0"/>
+                <a:ea typeface="Calibri" pitchFamily="34" charset="-122"/>
+                <a:cs typeface="Calibri" pitchFamily="34" charset="-120"/>
+              </a:rPr>
+              <a:t>Résultats</a:t>
             </a:r>
             <a:endParaRPr lang="en-US" sz="1400" dirty="0"/>
           </a:p>
@@ -8825,6 +9095,327 @@
               <a:t>Analyse critique &amp; Perspectives</a:t>
             </a:r>
             <a:endParaRPr lang="en-US" sz="1400" dirty="0"/>
+          </a:p>
+        </p:txBody>
+      </p:sp>
+      <p:pic>
+        <p:nvPicPr>
+          <p:cNvPr id="30" name="Image 29">
+            <a:extLst>
+              <a:ext uri="{FF2B5EF4-FFF2-40B4-BE49-F238E27FC236}">
+                <a16:creationId xmlns:a16="http://schemas.microsoft.com/office/drawing/2014/main" id="{E7982388-C0BE-7E52-FE7C-EE36E1460A65}"/>
+              </a:ext>
+            </a:extLst>
+          </p:cNvPr>
+          <p:cNvPicPr>
+            <a:picLocks noChangeAspect="1"/>
+          </p:cNvPicPr>
+          <p:nvPr/>
+        </p:nvPicPr>
+        <p:blipFill>
+          <a:blip r:embed="rId3">
+            <a:duotone>
+              <a:prstClr val="black"/>
+              <a:schemeClr val="tx1">
+                <a:tint val="45000"/>
+                <a:satMod val="400000"/>
+              </a:schemeClr>
+            </a:duotone>
+            <a:extLst>
+              <a:ext uri="{BEBA8EAE-BF5A-486C-A8C5-ECC9F3942E4B}">
+                <a14:imgProps xmlns:a14="http://schemas.microsoft.com/office/drawing/2010/main">
+                  <a14:imgLayer r:embed="rId4">
+                    <a14:imgEffect>
+                      <a14:brightnessContrast bright="-100000" contrast="100000"/>
+                    </a14:imgEffect>
+                  </a14:imgLayer>
+                </a14:imgProps>
+              </a:ext>
+            </a:extLst>
+          </a:blip>
+          <a:srcRect t="76759"/>
+          <a:stretch>
+            <a:fillRect/>
+          </a:stretch>
+        </p:blipFill>
+        <p:spPr>
+          <a:xfrm>
+            <a:off x="7340011" y="182880"/>
+            <a:ext cx="1605869" cy="306835"/>
+          </a:xfrm>
+          <a:prstGeom prst="rect">
+            <a:avLst/>
+          </a:prstGeom>
+        </p:spPr>
+      </p:pic>
+      <p:sp>
+        <p:nvSpPr>
+          <p:cNvPr id="33" name="Parenthèse fermante 32">
+            <a:extLst>
+              <a:ext uri="{FF2B5EF4-FFF2-40B4-BE49-F238E27FC236}">
+                <a16:creationId xmlns:a16="http://schemas.microsoft.com/office/drawing/2014/main" id="{1B2F34AC-62B1-B9B0-1F5D-03C2D8F67594}"/>
+              </a:ext>
+            </a:extLst>
+          </p:cNvPr>
+          <p:cNvSpPr/>
+          <p:nvPr/>
+        </p:nvSpPr>
+        <p:spPr>
+          <a:xfrm>
+            <a:off x="4882745" y="2099603"/>
+            <a:ext cx="221063" cy="1557997"/>
+          </a:xfrm>
+          <a:prstGeom prst="rightBracket">
+            <a:avLst/>
+          </a:prstGeom>
+        </p:spPr>
+        <p:style>
+          <a:lnRef idx="1">
+            <a:schemeClr val="accent1"/>
+          </a:lnRef>
+          <a:fillRef idx="0">
+            <a:schemeClr val="accent1"/>
+          </a:fillRef>
+          <a:effectRef idx="0">
+            <a:schemeClr val="accent1"/>
+          </a:effectRef>
+          <a:fontRef idx="minor">
+            <a:schemeClr val="tx1"/>
+          </a:fontRef>
+        </p:style>
+        <p:txBody>
+          <a:bodyPr rtlCol="0" anchor="ctr"/>
+          <a:lstStyle/>
+          <a:p>
+            <a:pPr algn="ctr"/>
+            <a:endParaRPr lang="fr-FR"/>
+          </a:p>
+        </p:txBody>
+      </p:sp>
+      <p:sp>
+        <p:nvSpPr>
+          <p:cNvPr id="34" name="Shape 1">
+            <a:extLst>
+              <a:ext uri="{FF2B5EF4-FFF2-40B4-BE49-F238E27FC236}">
+                <a16:creationId xmlns:a16="http://schemas.microsoft.com/office/drawing/2014/main" id="{0C7EE553-AC1E-B11F-AD93-AA026B39ED3A}"/>
+              </a:ext>
+            </a:extLst>
+          </p:cNvPr>
+          <p:cNvSpPr/>
+          <p:nvPr/>
+        </p:nvSpPr>
+        <p:spPr>
+          <a:xfrm>
+            <a:off x="5225141" y="2103120"/>
+            <a:ext cx="3461659" cy="1554480"/>
+          </a:xfrm>
+          <a:prstGeom prst="roundRect">
+            <a:avLst>
+              <a:gd name="adj" fmla="val 4505"/>
+            </a:avLst>
+          </a:prstGeom>
+          <a:solidFill>
+            <a:srgbClr val="EEF2FF"/>
+          </a:solidFill>
+          <a:ln w="6350">
+            <a:solidFill>
+              <a:srgbClr val="D1D5DB"/>
+            </a:solidFill>
+            <a:prstDash val="solid"/>
+          </a:ln>
+          <a:effectLst>
+            <a:outerShdw blurRad="101600" dist="25400" dir="2700000" algn="bl" rotWithShape="0">
+              <a:srgbClr val="000000">
+                <a:alpha val="12000"/>
+              </a:srgbClr>
+            </a:outerShdw>
+          </a:effectLst>
+        </p:spPr>
+        <p:txBody>
+          <a:bodyPr/>
+          <a:lstStyle/>
+          <a:p>
+            <a:endParaRPr lang="fr-FR"/>
+          </a:p>
+        </p:txBody>
+      </p:sp>
+      <p:sp>
+        <p:nvSpPr>
+          <p:cNvPr id="35" name="Text 11">
+            <a:extLst>
+              <a:ext uri="{FF2B5EF4-FFF2-40B4-BE49-F238E27FC236}">
+                <a16:creationId xmlns:a16="http://schemas.microsoft.com/office/drawing/2014/main" id="{D3238993-5894-5E10-DA4F-BBBDBC69AB28}"/>
+              </a:ext>
+            </a:extLst>
+          </p:cNvPr>
+          <p:cNvSpPr/>
+          <p:nvPr/>
+        </p:nvSpPr>
+        <p:spPr>
+          <a:xfrm>
+            <a:off x="5399842" y="2606040"/>
+            <a:ext cx="3880338" cy="457200"/>
+          </a:xfrm>
+          <a:prstGeom prst="rect">
+            <a:avLst/>
+          </a:prstGeom>
+          <a:noFill/>
+          <a:ln/>
+        </p:spPr>
+        <p:txBody>
+          <a:bodyPr wrap="square" lIns="0" tIns="0" rIns="0" bIns="0" rtlCol="0" anchor="ctr"/>
+          <a:lstStyle/>
+          <a:p>
+            <a:pPr marL="0" indent="0">
+              <a:buNone/>
+            </a:pPr>
+            <a:r>
+              <a:rPr lang="en-US" sz="1600" dirty="0">
+                <a:solidFill>
+                  <a:srgbClr val="1E2761"/>
+                </a:solidFill>
+                <a:latin typeface="Calibri" pitchFamily="34" charset="0"/>
+                <a:ea typeface="Calibri" pitchFamily="34" charset="-122"/>
+                <a:cs typeface="Calibri" pitchFamily="34" charset="-120"/>
+              </a:rPr>
+              <a:t>Explications </a:t>
+            </a:r>
+            <a:r>
+              <a:rPr lang="en-US" sz="1600" dirty="0" err="1">
+                <a:solidFill>
+                  <a:srgbClr val="1E2761"/>
+                </a:solidFill>
+                <a:latin typeface="Calibri" pitchFamily="34" charset="0"/>
+                <a:ea typeface="Calibri" pitchFamily="34" charset="-122"/>
+                <a:cs typeface="Calibri" pitchFamily="34" charset="-120"/>
+              </a:rPr>
+              <a:t>théoriques</a:t>
+            </a:r>
+            <a:endParaRPr lang="en-US" sz="1600" dirty="0">
+              <a:solidFill>
+                <a:srgbClr val="1E2761"/>
+              </a:solidFill>
+              <a:latin typeface="Calibri" pitchFamily="34" charset="0"/>
+              <a:ea typeface="Calibri" pitchFamily="34" charset="-122"/>
+              <a:cs typeface="Calibri" pitchFamily="34" charset="-120"/>
+            </a:endParaRPr>
+          </a:p>
+          <a:p>
+            <a:pPr marL="0" indent="0">
+              <a:buNone/>
+            </a:pPr>
+            <a:r>
+              <a:rPr lang="en-US" sz="1600" dirty="0">
+                <a:solidFill>
+                  <a:srgbClr val="1E2761"/>
+                </a:solidFill>
+                <a:latin typeface="Calibri" pitchFamily="34" charset="0"/>
+                <a:ea typeface="Calibri" pitchFamily="34" charset="-122"/>
+                <a:cs typeface="Calibri" pitchFamily="34" charset="-120"/>
+              </a:rPr>
+              <a:t>&amp;</a:t>
+            </a:r>
+          </a:p>
+          <a:p>
+            <a:pPr marL="0" indent="0">
+              <a:buNone/>
+            </a:pPr>
+            <a:r>
+              <a:rPr lang="en-US" sz="1600" dirty="0" err="1">
+                <a:solidFill>
+                  <a:srgbClr val="1E2761"/>
+                </a:solidFill>
+                <a:latin typeface="Calibri" pitchFamily="34" charset="0"/>
+                <a:ea typeface="Calibri" pitchFamily="34" charset="-122"/>
+                <a:cs typeface="Calibri" pitchFamily="34" charset="-120"/>
+              </a:rPr>
+              <a:t>Démonstrations</a:t>
+            </a:r>
+            <a:r>
+              <a:rPr lang="en-US" sz="1600" dirty="0">
+                <a:solidFill>
+                  <a:srgbClr val="1E2761"/>
+                </a:solidFill>
+                <a:latin typeface="Calibri" pitchFamily="34" charset="0"/>
+                <a:ea typeface="Calibri" pitchFamily="34" charset="-122"/>
+                <a:cs typeface="Calibri" pitchFamily="34" charset="-120"/>
+              </a:rPr>
+              <a:t> pratiques </a:t>
+            </a:r>
+          </a:p>
+          <a:p>
+            <a:pPr marL="0" indent="0">
+              <a:buNone/>
+            </a:pPr>
+            <a:endParaRPr lang="en-US" sz="1600" dirty="0">
+              <a:solidFill>
+                <a:srgbClr val="1E2761"/>
+              </a:solidFill>
+              <a:latin typeface="Calibri" pitchFamily="34" charset="0"/>
+              <a:ea typeface="Calibri" pitchFamily="34" charset="-122"/>
+              <a:cs typeface="Calibri" pitchFamily="34" charset="-120"/>
+            </a:endParaRPr>
+          </a:p>
+          <a:p>
+            <a:pPr marL="0" indent="0">
+              <a:buNone/>
+            </a:pPr>
+            <a:r>
+              <a:rPr lang="en-US" sz="1600" dirty="0">
+                <a:solidFill>
+                  <a:srgbClr val="1E2761"/>
+                </a:solidFill>
+                <a:latin typeface="Calibri" pitchFamily="34" charset="0"/>
+                <a:ea typeface="Calibri" pitchFamily="34" charset="-122"/>
+                <a:cs typeface="Calibri" pitchFamily="34" charset="-120"/>
+              </a:rPr>
+              <a:t>(</a:t>
+            </a:r>
+            <a:r>
+              <a:rPr lang="en-US" sz="1600" dirty="0" err="1">
+                <a:solidFill>
+                  <a:srgbClr val="1E2761"/>
+                </a:solidFill>
+                <a:latin typeface="Calibri" pitchFamily="34" charset="0"/>
+                <a:ea typeface="Calibri" pitchFamily="34" charset="-122"/>
+                <a:cs typeface="Calibri" pitchFamily="34" charset="-120"/>
+              </a:rPr>
+              <a:t>en</a:t>
+            </a:r>
+            <a:r>
+              <a:rPr lang="en-US" sz="1600" dirty="0">
+                <a:solidFill>
+                  <a:srgbClr val="1E2761"/>
+                </a:solidFill>
+                <a:latin typeface="Calibri" pitchFamily="34" charset="0"/>
+                <a:ea typeface="Calibri" pitchFamily="34" charset="-122"/>
+                <a:cs typeface="Calibri" pitchFamily="34" charset="-120"/>
+              </a:rPr>
+              <a:t> </a:t>
+            </a:r>
+            <a:r>
+              <a:rPr lang="en-US" sz="1600" dirty="0" err="1">
+                <a:solidFill>
+                  <a:srgbClr val="1E2761"/>
+                </a:solidFill>
+                <a:latin typeface="Calibri" pitchFamily="34" charset="0"/>
+                <a:ea typeface="Calibri" pitchFamily="34" charset="-122"/>
+                <a:cs typeface="Calibri" pitchFamily="34" charset="-120"/>
+              </a:rPr>
+              <a:t>parallèle</a:t>
+            </a:r>
+            <a:r>
+              <a:rPr lang="en-US" sz="1600" dirty="0">
+                <a:solidFill>
+                  <a:srgbClr val="1E2761"/>
+                </a:solidFill>
+                <a:latin typeface="Calibri" pitchFamily="34" charset="0"/>
+                <a:ea typeface="Calibri" pitchFamily="34" charset="-122"/>
+                <a:cs typeface="Calibri" pitchFamily="34" charset="-120"/>
+              </a:rPr>
+              <a:t>)</a:t>
+            </a:r>
+            <a:endParaRPr lang="en-US" sz="1600" dirty="0"/>
           </a:p>
         </p:txBody>
       </p:sp>
@@ -9013,7 +9604,7 @@
                 <a:ea typeface="Calibri" pitchFamily="34" charset="-122"/>
                 <a:cs typeface="Calibri" pitchFamily="34" charset="-120"/>
               </a:rPr>
-              <a:t>PME de services numériques — 50 salariés</a:t>
+              <a:t>Simulation de PME de services numériques — 50 salariés</a:t>
             </a:r>
             <a:endParaRPr lang="en-US" sz="1200" dirty="0"/>
           </a:p>
@@ -9052,7 +9643,7 @@
                 <a:ea typeface="Calibri" pitchFamily="34" charset="-122"/>
                 <a:cs typeface="Calibri" pitchFamily="34" charset="-120"/>
               </a:rPr>
-              <a:t>📍 Site Principal — Paris (IP WAN fixe)</a:t>
+              <a:t>Site Principal — Paris (IP WAN fixe)</a:t>
             </a:r>
             <a:endParaRPr lang="en-US" sz="1100" dirty="0"/>
           </a:p>
@@ -9091,7 +9682,7 @@
                 <a:ea typeface="Calibri" pitchFamily="34" charset="-122"/>
                 <a:cs typeface="Calibri" pitchFamily="34" charset="-120"/>
               </a:rPr>
-              <a:t>📍 Site Isolé — Lyon (IP WAN dynamique)</a:t>
+              <a:t>Site Isolé — Lyon (IP WAN dynamique)</a:t>
             </a:r>
             <a:endParaRPr lang="en-US" sz="1100" dirty="0"/>
           </a:p>
@@ -9407,7 +9998,7 @@
           <a:bodyPr/>
           <a:lstStyle/>
           <a:p>
-            <a:endParaRPr lang="fr-FR"/>
+            <a:endParaRPr lang="fr-FR" dirty="0"/>
           </a:p>
         </p:txBody>
       </p:sp>
@@ -9539,6 +10130,56 @@
           </a:p>
         </p:txBody>
       </p:sp>
+      <p:pic>
+        <p:nvPicPr>
+          <p:cNvPr id="18" name="Image 17">
+            <a:extLst>
+              <a:ext uri="{FF2B5EF4-FFF2-40B4-BE49-F238E27FC236}">
+                <a16:creationId xmlns:a16="http://schemas.microsoft.com/office/drawing/2014/main" id="{DD7A4198-E88D-B8DF-7D9D-CDFB8B140CD6}"/>
+              </a:ext>
+            </a:extLst>
+          </p:cNvPr>
+          <p:cNvPicPr>
+            <a:picLocks noChangeAspect="1"/>
+          </p:cNvPicPr>
+          <p:nvPr/>
+        </p:nvPicPr>
+        <p:blipFill>
+          <a:blip r:embed="rId3">
+            <a:duotone>
+              <a:prstClr val="black"/>
+              <a:schemeClr val="tx1">
+                <a:tint val="45000"/>
+                <a:satMod val="400000"/>
+              </a:schemeClr>
+            </a:duotone>
+            <a:extLst>
+              <a:ext uri="{BEBA8EAE-BF5A-486C-A8C5-ECC9F3942E4B}">
+                <a14:imgProps xmlns:a14="http://schemas.microsoft.com/office/drawing/2010/main">
+                  <a14:imgLayer r:embed="rId4">
+                    <a14:imgEffect>
+                      <a14:brightnessContrast bright="-100000" contrast="100000"/>
+                    </a14:imgEffect>
+                  </a14:imgLayer>
+                </a14:imgProps>
+              </a:ext>
+            </a:extLst>
+          </a:blip>
+          <a:srcRect t="76759"/>
+          <a:stretch>
+            <a:fillRect/>
+          </a:stretch>
+        </p:blipFill>
+        <p:spPr>
+          <a:xfrm>
+            <a:off x="7340011" y="182880"/>
+            <a:ext cx="1605869" cy="306835"/>
+          </a:xfrm>
+          <a:prstGeom prst="rect">
+            <a:avLst/>
+          </a:prstGeom>
+        </p:spPr>
+      </p:pic>
     </p:spTree>
   </p:cSld>
   <p:clrMapOvr>
@@ -10614,6 +11255,56 @@
           </a:p>
         </p:txBody>
       </p:sp>
+      <p:pic>
+        <p:nvPicPr>
+          <p:cNvPr id="27" name="Image 26">
+            <a:extLst>
+              <a:ext uri="{FF2B5EF4-FFF2-40B4-BE49-F238E27FC236}">
+                <a16:creationId xmlns:a16="http://schemas.microsoft.com/office/drawing/2014/main" id="{27AD327D-EAA2-9760-B19C-127C2E7CC089}"/>
+              </a:ext>
+            </a:extLst>
+          </p:cNvPr>
+          <p:cNvPicPr>
+            <a:picLocks noChangeAspect="1"/>
+          </p:cNvPicPr>
+          <p:nvPr/>
+        </p:nvPicPr>
+        <p:blipFill>
+          <a:blip r:embed="rId3">
+            <a:duotone>
+              <a:prstClr val="black"/>
+              <a:schemeClr val="tx1">
+                <a:tint val="45000"/>
+                <a:satMod val="400000"/>
+              </a:schemeClr>
+            </a:duotone>
+            <a:extLst>
+              <a:ext uri="{BEBA8EAE-BF5A-486C-A8C5-ECC9F3942E4B}">
+                <a14:imgProps xmlns:a14="http://schemas.microsoft.com/office/drawing/2010/main">
+                  <a14:imgLayer r:embed="rId4">
+                    <a14:imgEffect>
+                      <a14:brightnessContrast bright="2000"/>
+                    </a14:imgEffect>
+                  </a14:imgLayer>
+                </a14:imgProps>
+              </a:ext>
+            </a:extLst>
+          </a:blip>
+          <a:srcRect t="76759"/>
+          <a:stretch>
+            <a:fillRect/>
+          </a:stretch>
+        </p:blipFill>
+        <p:spPr>
+          <a:xfrm>
+            <a:off x="7340011" y="182880"/>
+            <a:ext cx="1605869" cy="306835"/>
+          </a:xfrm>
+          <a:prstGeom prst="rect">
+            <a:avLst/>
+          </a:prstGeom>
+        </p:spPr>
+      </p:pic>
     </p:spTree>
   </p:cSld>
   <p:clrMapOvr>
@@ -10849,7 +11540,18 @@
                 <a:ea typeface="Calibri" pitchFamily="34" charset="-122"/>
                 <a:cs typeface="Calibri" pitchFamily="34" charset="-120"/>
               </a:rPr>
-              <a:t>Open source, tout-en-un, intègre tous les services</a:t>
+              <a:t>Open source, tout-en-un, intègre tous les services, déjà </a:t>
+            </a:r>
+            <a:r>
+              <a:rPr lang="en-US" sz="1000" dirty="0" err="1">
+                <a:solidFill>
+                  <a:srgbClr val="4B5563"/>
+                </a:solidFill>
+                <a:latin typeface="Calibri" pitchFamily="34" charset="0"/>
+                <a:ea typeface="Calibri" pitchFamily="34" charset="-122"/>
+                <a:cs typeface="Calibri" pitchFamily="34" charset="-120"/>
+              </a:rPr>
+              <a:t>maitrisé</a:t>
             </a:r>
             <a:endParaRPr lang="en-US" sz="1000" dirty="0"/>
           </a:p>
@@ -11645,6 +12347,56 @@
           </a:p>
         </p:txBody>
       </p:sp>
+      <p:pic>
+        <p:nvPicPr>
+          <p:cNvPr id="27" name="Image 26">
+            <a:extLst>
+              <a:ext uri="{FF2B5EF4-FFF2-40B4-BE49-F238E27FC236}">
+                <a16:creationId xmlns:a16="http://schemas.microsoft.com/office/drawing/2014/main" id="{04E00B21-4A1F-526F-6B33-09A478847AB1}"/>
+              </a:ext>
+            </a:extLst>
+          </p:cNvPr>
+          <p:cNvPicPr>
+            <a:picLocks noChangeAspect="1"/>
+          </p:cNvPicPr>
+          <p:nvPr/>
+        </p:nvPicPr>
+        <p:blipFill>
+          <a:blip r:embed="rId3">
+            <a:duotone>
+              <a:prstClr val="black"/>
+              <a:schemeClr val="tx1">
+                <a:tint val="45000"/>
+                <a:satMod val="400000"/>
+              </a:schemeClr>
+            </a:duotone>
+            <a:extLst>
+              <a:ext uri="{BEBA8EAE-BF5A-486C-A8C5-ECC9F3942E4B}">
+                <a14:imgProps xmlns:a14="http://schemas.microsoft.com/office/drawing/2010/main">
+                  <a14:imgLayer r:embed="rId4">
+                    <a14:imgEffect>
+                      <a14:brightnessContrast bright="-100000" contrast="100000"/>
+                    </a14:imgEffect>
+                  </a14:imgLayer>
+                </a14:imgProps>
+              </a:ext>
+            </a:extLst>
+          </a:blip>
+          <a:srcRect t="76759"/>
+          <a:stretch>
+            <a:fillRect/>
+          </a:stretch>
+        </p:blipFill>
+        <p:spPr>
+          <a:xfrm>
+            <a:off x="7340011" y="182880"/>
+            <a:ext cx="1605869" cy="306835"/>
+          </a:xfrm>
+          <a:prstGeom prst="rect">
+            <a:avLst/>
+          </a:prstGeom>
+        </p:spPr>
+      </p:pic>
     </p:spTree>
   </p:cSld>
   <p:clrMapOvr>
@@ -11726,7 +12478,7 @@
         <p:spPr>
           <a:xfrm>
             <a:off x="365760" y="822960"/>
-            <a:ext cx="4114800" cy="3566160"/>
+            <a:ext cx="4114800" cy="3105945"/>
           </a:xfrm>
           <a:prstGeom prst="roundRect">
             <a:avLst>
@@ -11816,7 +12568,7 @@
         </p:nvSpPr>
         <p:spPr>
           <a:xfrm>
-            <a:off x="548640" y="1371600"/>
+            <a:off x="548640" y="1289304"/>
             <a:ext cx="1371600" cy="411480"/>
           </a:xfrm>
           <a:prstGeom prst="rect">
@@ -11855,7 +12607,7 @@
         </p:nvSpPr>
         <p:spPr>
           <a:xfrm>
-            <a:off x="1965960" y="1371600"/>
+            <a:off x="1965960" y="1289304"/>
             <a:ext cx="2377440" cy="411480"/>
           </a:xfrm>
           <a:prstGeom prst="rect">
@@ -11894,7 +12646,7 @@
         </p:nvSpPr>
         <p:spPr>
           <a:xfrm>
-            <a:off x="548640" y="1856232"/>
+            <a:off x="548640" y="1714500"/>
             <a:ext cx="1371600" cy="411480"/>
           </a:xfrm>
           <a:prstGeom prst="rect">
@@ -11933,7 +12685,7 @@
         </p:nvSpPr>
         <p:spPr>
           <a:xfrm>
-            <a:off x="1965960" y="1856232"/>
+            <a:off x="1965960" y="1694403"/>
             <a:ext cx="2377440" cy="411480"/>
           </a:xfrm>
           <a:prstGeom prst="rect">
@@ -11972,7 +12724,7 @@
         </p:nvSpPr>
         <p:spPr>
           <a:xfrm>
-            <a:off x="548640" y="2340864"/>
+            <a:off x="548640" y="2125980"/>
             <a:ext cx="1371600" cy="411480"/>
           </a:xfrm>
           <a:prstGeom prst="rect">
@@ -12011,7 +12763,7 @@
         </p:nvSpPr>
         <p:spPr>
           <a:xfrm>
-            <a:off x="1965960" y="2340864"/>
+            <a:off x="1965960" y="2105883"/>
             <a:ext cx="2377440" cy="411480"/>
           </a:xfrm>
           <a:prstGeom prst="rect">
@@ -12050,7 +12802,7 @@
         </p:nvSpPr>
         <p:spPr>
           <a:xfrm>
-            <a:off x="548640" y="2825496"/>
+            <a:off x="548640" y="2546604"/>
             <a:ext cx="1371600" cy="411480"/>
           </a:xfrm>
           <a:prstGeom prst="rect">
@@ -12089,7 +12841,7 @@
         </p:nvSpPr>
         <p:spPr>
           <a:xfrm>
-            <a:off x="1965960" y="2825496"/>
+            <a:off x="1965960" y="2548513"/>
             <a:ext cx="2377440" cy="411480"/>
           </a:xfrm>
           <a:prstGeom prst="rect">
@@ -12128,7 +12880,7 @@
         </p:nvSpPr>
         <p:spPr>
           <a:xfrm>
-            <a:off x="548640" y="3310128"/>
+            <a:off x="548640" y="2967228"/>
             <a:ext cx="1371600" cy="411480"/>
           </a:xfrm>
           <a:prstGeom prst="rect">
@@ -12167,7 +12919,7 @@
         </p:nvSpPr>
         <p:spPr>
           <a:xfrm>
-            <a:off x="1965960" y="3310128"/>
+            <a:off x="1965960" y="2965896"/>
             <a:ext cx="2377440" cy="411480"/>
           </a:xfrm>
           <a:prstGeom prst="rect">
@@ -12206,7 +12958,7 @@
         </p:nvSpPr>
         <p:spPr>
           <a:xfrm>
-            <a:off x="548640" y="3794760"/>
+            <a:off x="548640" y="3389359"/>
             <a:ext cx="1371600" cy="411480"/>
           </a:xfrm>
           <a:prstGeom prst="rect">
@@ -12245,7 +12997,7 @@
         </p:nvSpPr>
         <p:spPr>
           <a:xfrm>
-            <a:off x="1965960" y="3794760"/>
+            <a:off x="1965960" y="3395890"/>
             <a:ext cx="2377440" cy="411480"/>
           </a:xfrm>
           <a:prstGeom prst="rect">
@@ -12285,7 +13037,7 @@
         <p:spPr>
           <a:xfrm>
             <a:off x="4663440" y="822960"/>
-            <a:ext cx="4114800" cy="3566160"/>
+            <a:ext cx="4114800" cy="3105945"/>
           </a:xfrm>
           <a:prstGeom prst="roundRect">
             <a:avLst>
@@ -12375,7 +13127,7 @@
         </p:nvSpPr>
         <p:spPr>
           <a:xfrm>
-            <a:off x="4800600" y="1371600"/>
+            <a:off x="4800600" y="1302518"/>
             <a:ext cx="1828800" cy="411480"/>
           </a:xfrm>
           <a:prstGeom prst="rect">
@@ -12414,7 +13166,7 @@
         </p:nvSpPr>
         <p:spPr>
           <a:xfrm>
-            <a:off x="6675120" y="1371600"/>
+            <a:off x="6675120" y="1308505"/>
             <a:ext cx="1920240" cy="411480"/>
           </a:xfrm>
           <a:prstGeom prst="rect">
@@ -12453,7 +13205,7 @@
         </p:nvSpPr>
         <p:spPr>
           <a:xfrm>
-            <a:off x="4800600" y="1856232"/>
+            <a:off x="4800600" y="1736356"/>
             <a:ext cx="1828800" cy="411480"/>
           </a:xfrm>
           <a:prstGeom prst="rect">
@@ -12492,7 +13244,7 @@
         </p:nvSpPr>
         <p:spPr>
           <a:xfrm>
-            <a:off x="6675120" y="1856232"/>
+            <a:off x="6675120" y="1688877"/>
             <a:ext cx="1920240" cy="411480"/>
           </a:xfrm>
           <a:prstGeom prst="rect">
@@ -12531,7 +13283,7 @@
         </p:nvSpPr>
         <p:spPr>
           <a:xfrm>
-            <a:off x="4800600" y="2340864"/>
+            <a:off x="4800600" y="2170192"/>
             <a:ext cx="1828800" cy="411480"/>
           </a:xfrm>
           <a:prstGeom prst="rect">
@@ -12570,7 +13322,7 @@
         </p:nvSpPr>
         <p:spPr>
           <a:xfrm>
-            <a:off x="6675120" y="2340864"/>
+            <a:off x="6675120" y="2125980"/>
             <a:ext cx="1920240" cy="411480"/>
           </a:xfrm>
           <a:prstGeom prst="rect">
@@ -12609,7 +13361,7 @@
         </p:nvSpPr>
         <p:spPr>
           <a:xfrm>
-            <a:off x="4800600" y="2825496"/>
+            <a:off x="4800600" y="2600411"/>
             <a:ext cx="1828800" cy="411480"/>
           </a:xfrm>
           <a:prstGeom prst="rect">
@@ -12648,7 +13400,7 @@
         </p:nvSpPr>
         <p:spPr>
           <a:xfrm>
-            <a:off x="6675120" y="2825496"/>
+            <a:off x="6675120" y="2610612"/>
             <a:ext cx="1920240" cy="411480"/>
           </a:xfrm>
           <a:prstGeom prst="rect">
@@ -12687,7 +13439,7 @@
         </p:nvSpPr>
         <p:spPr>
           <a:xfrm>
-            <a:off x="4800600" y="3310128"/>
+            <a:off x="4800600" y="3031236"/>
             <a:ext cx="1828800" cy="411480"/>
           </a:xfrm>
           <a:prstGeom prst="rect">
@@ -12726,7 +13478,7 @@
         </p:nvSpPr>
         <p:spPr>
           <a:xfrm>
-            <a:off x="6675120" y="3310128"/>
+            <a:off x="6675120" y="3035456"/>
             <a:ext cx="1920240" cy="411480"/>
           </a:xfrm>
           <a:prstGeom prst="rect">
@@ -12765,7 +13517,7 @@
         </p:nvSpPr>
         <p:spPr>
           <a:xfrm>
-            <a:off x="4800600" y="3794760"/>
+            <a:off x="4800600" y="3468090"/>
             <a:ext cx="1828800" cy="411480"/>
           </a:xfrm>
           <a:prstGeom prst="rect">
@@ -12804,7 +13556,7 @@
         </p:nvSpPr>
         <p:spPr>
           <a:xfrm>
-            <a:off x="6675120" y="3794760"/>
+            <a:off x="6675120" y="3470652"/>
             <a:ext cx="1920240" cy="411480"/>
           </a:xfrm>
           <a:prstGeom prst="rect">
@@ -12830,6 +13582,571 @@
                 <a:cs typeface="Calibri" pitchFamily="34" charset="-120"/>
               </a:rPr>
               <a:t>Déploiement zéro investissement matériel</a:t>
+            </a:r>
+            <a:endParaRPr lang="en-US" sz="1000" dirty="0"/>
+          </a:p>
+        </p:txBody>
+      </p:sp>
+      <p:pic>
+        <p:nvPicPr>
+          <p:cNvPr id="31" name="Image 30">
+            <a:extLst>
+              <a:ext uri="{FF2B5EF4-FFF2-40B4-BE49-F238E27FC236}">
+                <a16:creationId xmlns:a16="http://schemas.microsoft.com/office/drawing/2014/main" id="{1663C30D-7719-1A0A-D5EB-341499BC5CD0}"/>
+              </a:ext>
+            </a:extLst>
+          </p:cNvPr>
+          <p:cNvPicPr>
+            <a:picLocks noChangeAspect="1"/>
+          </p:cNvPicPr>
+          <p:nvPr/>
+        </p:nvPicPr>
+        <p:blipFill>
+          <a:blip r:embed="rId3">
+            <a:duotone>
+              <a:prstClr val="black"/>
+              <a:schemeClr val="tx1">
+                <a:tint val="45000"/>
+                <a:satMod val="400000"/>
+              </a:schemeClr>
+            </a:duotone>
+            <a:extLst>
+              <a:ext uri="{BEBA8EAE-BF5A-486C-A8C5-ECC9F3942E4B}">
+                <a14:imgProps xmlns:a14="http://schemas.microsoft.com/office/drawing/2010/main">
+                  <a14:imgLayer r:embed="rId4">
+                    <a14:imgEffect>
+                      <a14:brightnessContrast bright="-100000" contrast="100000"/>
+                    </a14:imgEffect>
+                  </a14:imgLayer>
+                </a14:imgProps>
+              </a:ext>
+            </a:extLst>
+          </a:blip>
+          <a:srcRect t="76759"/>
+          <a:stretch>
+            <a:fillRect/>
+          </a:stretch>
+        </p:blipFill>
+        <p:spPr>
+          <a:xfrm>
+            <a:off x="7340011" y="182880"/>
+            <a:ext cx="1605869" cy="306835"/>
+          </a:xfrm>
+          <a:prstGeom prst="rect">
+            <a:avLst/>
+          </a:prstGeom>
+        </p:spPr>
+      </p:pic>
+      <p:sp>
+        <p:nvSpPr>
+          <p:cNvPr id="32" name="Shape 1">
+            <a:extLst>
+              <a:ext uri="{FF2B5EF4-FFF2-40B4-BE49-F238E27FC236}">
+                <a16:creationId xmlns:a16="http://schemas.microsoft.com/office/drawing/2014/main" id="{DF6C784C-A692-9FB9-7060-21F8F2EC0531}"/>
+              </a:ext>
+            </a:extLst>
+          </p:cNvPr>
+          <p:cNvSpPr/>
+          <p:nvPr/>
+        </p:nvSpPr>
+        <p:spPr>
+          <a:xfrm>
+            <a:off x="365759" y="4066065"/>
+            <a:ext cx="8412481" cy="812410"/>
+          </a:xfrm>
+          <a:prstGeom prst="roundRect">
+            <a:avLst>
+              <a:gd name="adj" fmla="val 12838"/>
+            </a:avLst>
+          </a:prstGeom>
+          <a:solidFill>
+            <a:srgbClr val="EEF2FF"/>
+          </a:solidFill>
+          <a:ln w="6350">
+            <a:solidFill>
+              <a:srgbClr val="C7D2FE"/>
+            </a:solidFill>
+            <a:prstDash val="solid"/>
+          </a:ln>
+          <a:effectLst>
+            <a:outerShdw blurRad="101600" dist="25400" dir="2700000" algn="bl" rotWithShape="0">
+              <a:srgbClr val="000000">
+                <a:alpha val="12000"/>
+              </a:srgbClr>
+            </a:outerShdw>
+          </a:effectLst>
+        </p:spPr>
+        <p:txBody>
+          <a:bodyPr/>
+          <a:lstStyle/>
+          <a:p>
+            <a:endParaRPr lang="fr-FR" dirty="0"/>
+          </a:p>
+        </p:txBody>
+      </p:sp>
+      <p:sp>
+        <p:nvSpPr>
+          <p:cNvPr id="33" name="Text 2">
+            <a:extLst>
+              <a:ext uri="{FF2B5EF4-FFF2-40B4-BE49-F238E27FC236}">
+                <a16:creationId xmlns:a16="http://schemas.microsoft.com/office/drawing/2014/main" id="{32052E2C-C02B-6019-1EE5-E0A202A63865}"/>
+              </a:ext>
+            </a:extLst>
+          </p:cNvPr>
+          <p:cNvSpPr/>
+          <p:nvPr/>
+        </p:nvSpPr>
+        <p:spPr>
+          <a:xfrm>
+            <a:off x="457200" y="4137660"/>
+            <a:ext cx="3840480" cy="365760"/>
+          </a:xfrm>
+          <a:prstGeom prst="rect">
+            <a:avLst/>
+          </a:prstGeom>
+          <a:noFill/>
+          <a:ln/>
+        </p:spPr>
+        <p:txBody>
+          <a:bodyPr wrap="square" lIns="0" tIns="0" rIns="0" bIns="0" rtlCol="0" anchor="ctr"/>
+          <a:lstStyle/>
+          <a:p>
+            <a:pPr marL="0" indent="0">
+              <a:buNone/>
+            </a:pPr>
+            <a:r>
+              <a:rPr lang="en-US" sz="1400" b="1" dirty="0">
+                <a:solidFill>
+                  <a:srgbClr val="1E2761"/>
+                </a:solidFill>
+                <a:latin typeface="Cambria" pitchFamily="34" charset="0"/>
+                <a:ea typeface="Cambria" pitchFamily="34" charset="-122"/>
+                <a:cs typeface="Cambria" pitchFamily="34" charset="-120"/>
+              </a:rPr>
+              <a:t>Installation &amp; mise </a:t>
+            </a:r>
+            <a:r>
+              <a:rPr lang="en-US" sz="1400" b="1" dirty="0" err="1">
+                <a:solidFill>
+                  <a:srgbClr val="1E2761"/>
+                </a:solidFill>
+                <a:latin typeface="Cambria" pitchFamily="34" charset="0"/>
+                <a:ea typeface="Cambria" pitchFamily="34" charset="-122"/>
+                <a:cs typeface="Cambria" pitchFamily="34" charset="-120"/>
+              </a:rPr>
+              <a:t>en</a:t>
+            </a:r>
+            <a:r>
+              <a:rPr lang="en-US" sz="1400" b="1" dirty="0">
+                <a:solidFill>
+                  <a:srgbClr val="1E2761"/>
+                </a:solidFill>
+                <a:latin typeface="Cambria" pitchFamily="34" charset="0"/>
+                <a:ea typeface="Cambria" pitchFamily="34" charset="-122"/>
+                <a:cs typeface="Cambria" pitchFamily="34" charset="-120"/>
+              </a:rPr>
+              <a:t> place</a:t>
+            </a:r>
+            <a:endParaRPr lang="en-US" sz="1400" dirty="0"/>
+          </a:p>
+        </p:txBody>
+      </p:sp>
+      <p:sp>
+        <p:nvSpPr>
+          <p:cNvPr id="34" name="Text 4">
+            <a:extLst>
+              <a:ext uri="{FF2B5EF4-FFF2-40B4-BE49-F238E27FC236}">
+                <a16:creationId xmlns:a16="http://schemas.microsoft.com/office/drawing/2014/main" id="{C1AB240C-8EC6-C442-17C6-A03A8A62C8E3}"/>
+              </a:ext>
+            </a:extLst>
+          </p:cNvPr>
+          <p:cNvSpPr/>
+          <p:nvPr/>
+        </p:nvSpPr>
+        <p:spPr>
+          <a:xfrm>
+            <a:off x="457200" y="4369275"/>
+            <a:ext cx="2377440" cy="411480"/>
+          </a:xfrm>
+          <a:prstGeom prst="rect">
+            <a:avLst/>
+          </a:prstGeom>
+          <a:noFill/>
+          <a:ln/>
+        </p:spPr>
+        <p:txBody>
+          <a:bodyPr wrap="square" lIns="0" tIns="0" rIns="0" bIns="0" rtlCol="0" anchor="ctr"/>
+          <a:lstStyle/>
+          <a:p>
+            <a:pPr marL="0" indent="0">
+              <a:buNone/>
+            </a:pPr>
+            <a:r>
+              <a:rPr lang="en-US" sz="1000" dirty="0">
+                <a:solidFill>
+                  <a:srgbClr val="374151"/>
+                </a:solidFill>
+                <a:latin typeface="Calibri" pitchFamily="34" charset="0"/>
+                <a:ea typeface="Calibri" pitchFamily="34" charset="-122"/>
+                <a:cs typeface="Calibri" pitchFamily="34" charset="-120"/>
+              </a:rPr>
+              <a:t>2 </a:t>
+            </a:r>
+            <a:r>
+              <a:rPr lang="en-US" sz="1000" dirty="0" err="1">
+                <a:solidFill>
+                  <a:srgbClr val="374151"/>
+                </a:solidFill>
+                <a:latin typeface="Calibri" pitchFamily="34" charset="0"/>
+                <a:ea typeface="Calibri" pitchFamily="34" charset="-122"/>
+                <a:cs typeface="Calibri" pitchFamily="34" charset="-120"/>
+              </a:rPr>
+              <a:t>possibilités</a:t>
+            </a:r>
+            <a:endParaRPr lang="en-US" sz="1000" dirty="0"/>
+          </a:p>
+        </p:txBody>
+      </p:sp>
+      <p:sp>
+        <p:nvSpPr>
+          <p:cNvPr id="35" name="Text 3">
+            <a:extLst>
+              <a:ext uri="{FF2B5EF4-FFF2-40B4-BE49-F238E27FC236}">
+                <a16:creationId xmlns:a16="http://schemas.microsoft.com/office/drawing/2014/main" id="{36548B24-C8A0-A08F-600B-5A468286E6D1}"/>
+              </a:ext>
+            </a:extLst>
+          </p:cNvPr>
+          <p:cNvSpPr/>
+          <p:nvPr/>
+        </p:nvSpPr>
+        <p:spPr>
+          <a:xfrm>
+            <a:off x="3977640" y="4114800"/>
+            <a:ext cx="1371600" cy="411480"/>
+          </a:xfrm>
+          <a:prstGeom prst="rect">
+            <a:avLst/>
+          </a:prstGeom>
+          <a:noFill/>
+          <a:ln/>
+        </p:spPr>
+        <p:txBody>
+          <a:bodyPr wrap="square" lIns="0" tIns="0" rIns="0" bIns="0" rtlCol="0" anchor="ctr"/>
+          <a:lstStyle/>
+          <a:p>
+            <a:pPr marL="0" indent="0">
+              <a:buNone/>
+            </a:pPr>
+            <a:r>
+              <a:rPr lang="en-US" sz="1000" b="1" dirty="0">
+                <a:solidFill>
+                  <a:srgbClr val="1E2761"/>
+                </a:solidFill>
+                <a:latin typeface="Calibri" pitchFamily="34" charset="0"/>
+                <a:ea typeface="Calibri" pitchFamily="34" charset="-122"/>
+                <a:cs typeface="Calibri" pitchFamily="34" charset="-120"/>
+              </a:rPr>
+              <a:t>1/ Installation </a:t>
+            </a:r>
+            <a:r>
+              <a:rPr lang="en-US" sz="1000" b="1" dirty="0" err="1">
+                <a:solidFill>
+                  <a:srgbClr val="1E2761"/>
+                </a:solidFill>
+                <a:latin typeface="Calibri" pitchFamily="34" charset="0"/>
+                <a:ea typeface="Calibri" pitchFamily="34" charset="-122"/>
+                <a:cs typeface="Calibri" pitchFamily="34" charset="-120"/>
+              </a:rPr>
+              <a:t>manuelle</a:t>
+            </a:r>
+            <a:endParaRPr lang="en-US" sz="1000" dirty="0"/>
+          </a:p>
+        </p:txBody>
+      </p:sp>
+      <p:sp>
+        <p:nvSpPr>
+          <p:cNvPr id="36" name="Text 3">
+            <a:extLst>
+              <a:ext uri="{FF2B5EF4-FFF2-40B4-BE49-F238E27FC236}">
+                <a16:creationId xmlns:a16="http://schemas.microsoft.com/office/drawing/2014/main" id="{BA2C72F6-7A8A-E2B5-C954-22381572F3F9}"/>
+              </a:ext>
+            </a:extLst>
+          </p:cNvPr>
+          <p:cNvSpPr/>
+          <p:nvPr/>
+        </p:nvSpPr>
+        <p:spPr>
+          <a:xfrm>
+            <a:off x="6743712" y="4114800"/>
+            <a:ext cx="1371600" cy="411480"/>
+          </a:xfrm>
+          <a:prstGeom prst="rect">
+            <a:avLst/>
+          </a:prstGeom>
+          <a:noFill/>
+          <a:ln/>
+        </p:spPr>
+        <p:txBody>
+          <a:bodyPr wrap="square" lIns="0" tIns="0" rIns="0" bIns="0" rtlCol="0" anchor="ctr"/>
+          <a:lstStyle/>
+          <a:p>
+            <a:pPr marL="0" indent="0">
+              <a:buNone/>
+            </a:pPr>
+            <a:r>
+              <a:rPr lang="en-US" sz="1000" b="1" dirty="0">
+                <a:solidFill>
+                  <a:srgbClr val="1E2761"/>
+                </a:solidFill>
+                <a:latin typeface="Calibri" pitchFamily="34" charset="0"/>
+                <a:ea typeface="Calibri" pitchFamily="34" charset="-122"/>
+                <a:cs typeface="Calibri" pitchFamily="34" charset="-120"/>
+              </a:rPr>
+              <a:t>2/ </a:t>
+            </a:r>
+            <a:r>
+              <a:rPr lang="en-US" sz="1000" b="1" dirty="0" err="1">
+                <a:solidFill>
+                  <a:srgbClr val="1E2761"/>
+                </a:solidFill>
+                <a:latin typeface="Calibri" pitchFamily="34" charset="0"/>
+                <a:ea typeface="Calibri" pitchFamily="34" charset="-122"/>
+                <a:cs typeface="Calibri" pitchFamily="34" charset="-120"/>
+              </a:rPr>
+              <a:t>Fichiers</a:t>
+            </a:r>
+            <a:r>
+              <a:rPr lang="en-US" sz="1000" b="1" dirty="0">
+                <a:solidFill>
+                  <a:srgbClr val="1E2761"/>
+                </a:solidFill>
+                <a:latin typeface="Calibri" pitchFamily="34" charset="0"/>
+                <a:ea typeface="Calibri" pitchFamily="34" charset="-122"/>
+                <a:cs typeface="Calibri" pitchFamily="34" charset="-120"/>
+              </a:rPr>
+              <a:t> VMK</a:t>
+            </a:r>
+            <a:endParaRPr lang="en-US" sz="1000" dirty="0"/>
+          </a:p>
+        </p:txBody>
+      </p:sp>
+      <p:sp>
+        <p:nvSpPr>
+          <p:cNvPr id="37" name="Text 4">
+            <a:extLst>
+              <a:ext uri="{FF2B5EF4-FFF2-40B4-BE49-F238E27FC236}">
+                <a16:creationId xmlns:a16="http://schemas.microsoft.com/office/drawing/2014/main" id="{2AAFB415-764A-7F3F-2233-259BEDA91E53}"/>
+              </a:ext>
+            </a:extLst>
+          </p:cNvPr>
+          <p:cNvSpPr/>
+          <p:nvPr/>
+        </p:nvSpPr>
+        <p:spPr>
+          <a:xfrm>
+            <a:off x="3977640" y="4369702"/>
+            <a:ext cx="2103144" cy="411480"/>
+          </a:xfrm>
+          <a:prstGeom prst="rect">
+            <a:avLst/>
+          </a:prstGeom>
+          <a:noFill/>
+          <a:ln/>
+        </p:spPr>
+        <p:txBody>
+          <a:bodyPr wrap="square" lIns="0" tIns="0" rIns="0" bIns="0" rtlCol="0" anchor="ctr"/>
+          <a:lstStyle/>
+          <a:p>
+            <a:pPr marL="0" indent="0">
+              <a:buNone/>
+            </a:pPr>
+            <a:r>
+              <a:rPr lang="en-US" sz="1000" dirty="0" err="1">
+                <a:solidFill>
+                  <a:srgbClr val="374151"/>
+                </a:solidFill>
+                <a:latin typeface="Calibri" pitchFamily="34" charset="0"/>
+                <a:ea typeface="Calibri" pitchFamily="34" charset="-122"/>
+                <a:cs typeface="Calibri" pitchFamily="34" charset="-120"/>
+              </a:rPr>
+              <a:t>Suivre</a:t>
+            </a:r>
+            <a:r>
+              <a:rPr lang="en-US" sz="1000" dirty="0">
+                <a:solidFill>
+                  <a:srgbClr val="374151"/>
+                </a:solidFill>
+                <a:latin typeface="Calibri" pitchFamily="34" charset="0"/>
+                <a:ea typeface="Calibri" pitchFamily="34" charset="-122"/>
+                <a:cs typeface="Calibri" pitchFamily="34" charset="-120"/>
+              </a:rPr>
+              <a:t> le </a:t>
+            </a:r>
+            <a:r>
+              <a:rPr lang="en-US" sz="1000" dirty="0" err="1">
+                <a:solidFill>
+                  <a:srgbClr val="374151"/>
+                </a:solidFill>
+                <a:latin typeface="Calibri" pitchFamily="34" charset="0"/>
+                <a:ea typeface="Calibri" pitchFamily="34" charset="-122"/>
+                <a:cs typeface="Calibri" pitchFamily="34" charset="-120"/>
+              </a:rPr>
+              <a:t>fichier</a:t>
+            </a:r>
+            <a:r>
+              <a:rPr lang="en-US" sz="1000" dirty="0">
+                <a:solidFill>
+                  <a:srgbClr val="374151"/>
+                </a:solidFill>
+                <a:latin typeface="Calibri" pitchFamily="34" charset="0"/>
+                <a:ea typeface="Calibri" pitchFamily="34" charset="-122"/>
+                <a:cs typeface="Calibri" pitchFamily="34" charset="-120"/>
+              </a:rPr>
+              <a:t> </a:t>
+            </a:r>
+            <a:r>
+              <a:rPr lang="en-US" sz="1000" dirty="0" err="1">
+                <a:solidFill>
+                  <a:srgbClr val="374151"/>
+                </a:solidFill>
+                <a:latin typeface="Calibri" pitchFamily="34" charset="0"/>
+                <a:ea typeface="Calibri" pitchFamily="34" charset="-122"/>
+                <a:cs typeface="Calibri" pitchFamily="34" charset="-120"/>
+              </a:rPr>
+              <a:t>d’installation</a:t>
+            </a:r>
+            <a:r>
+              <a:rPr lang="en-US" sz="1000" dirty="0">
+                <a:solidFill>
+                  <a:srgbClr val="374151"/>
+                </a:solidFill>
+                <a:latin typeface="Calibri" pitchFamily="34" charset="0"/>
+                <a:ea typeface="Calibri" pitchFamily="34" charset="-122"/>
+                <a:cs typeface="Calibri" pitchFamily="34" charset="-120"/>
+              </a:rPr>
+              <a:t> pas-à-pas </a:t>
+            </a:r>
+            <a:r>
+              <a:rPr lang="en-US" sz="1000" dirty="0" err="1">
+                <a:solidFill>
+                  <a:srgbClr val="374151"/>
+                </a:solidFill>
+                <a:latin typeface="Calibri" pitchFamily="34" charset="0"/>
+                <a:ea typeface="Calibri" pitchFamily="34" charset="-122"/>
+                <a:cs typeface="Calibri" pitchFamily="34" charset="-120"/>
+              </a:rPr>
+              <a:t>fournit</a:t>
+            </a:r>
+            <a:r>
+              <a:rPr lang="en-US" sz="1000" dirty="0">
+                <a:solidFill>
+                  <a:srgbClr val="374151"/>
+                </a:solidFill>
+                <a:latin typeface="Calibri" pitchFamily="34" charset="0"/>
+                <a:ea typeface="Calibri" pitchFamily="34" charset="-122"/>
+                <a:cs typeface="Calibri" pitchFamily="34" charset="-120"/>
+              </a:rPr>
+              <a:t> (GitHub du </a:t>
+            </a:r>
+            <a:r>
+              <a:rPr lang="en-US" sz="1000" dirty="0" err="1">
+                <a:solidFill>
+                  <a:srgbClr val="374151"/>
+                </a:solidFill>
+                <a:latin typeface="Calibri" pitchFamily="34" charset="0"/>
+                <a:ea typeface="Calibri" pitchFamily="34" charset="-122"/>
+                <a:cs typeface="Calibri" pitchFamily="34" charset="-120"/>
+              </a:rPr>
+              <a:t>projet</a:t>
+            </a:r>
+            <a:r>
+              <a:rPr lang="en-US" sz="1000" dirty="0">
+                <a:solidFill>
+                  <a:srgbClr val="374151"/>
+                </a:solidFill>
+                <a:latin typeface="Calibri" pitchFamily="34" charset="0"/>
+                <a:ea typeface="Calibri" pitchFamily="34" charset="-122"/>
+                <a:cs typeface="Calibri" pitchFamily="34" charset="-120"/>
+              </a:rPr>
+              <a:t>) et les screens</a:t>
+            </a:r>
+            <a:endParaRPr lang="en-US" sz="1000" dirty="0"/>
+          </a:p>
+        </p:txBody>
+      </p:sp>
+      <p:sp>
+        <p:nvSpPr>
+          <p:cNvPr id="38" name="Text 4">
+            <a:extLst>
+              <a:ext uri="{FF2B5EF4-FFF2-40B4-BE49-F238E27FC236}">
+                <a16:creationId xmlns:a16="http://schemas.microsoft.com/office/drawing/2014/main" id="{95B6B450-64F2-F88B-BFCA-C2DC58EF958A}"/>
+              </a:ext>
+            </a:extLst>
+          </p:cNvPr>
+          <p:cNvSpPr/>
+          <p:nvPr/>
+        </p:nvSpPr>
+        <p:spPr>
+          <a:xfrm>
+            <a:off x="6748975" y="4297680"/>
+            <a:ext cx="2029265" cy="411480"/>
+          </a:xfrm>
+          <a:prstGeom prst="rect">
+            <a:avLst/>
+          </a:prstGeom>
+          <a:noFill/>
+          <a:ln/>
+        </p:spPr>
+        <p:txBody>
+          <a:bodyPr wrap="square" lIns="0" tIns="0" rIns="0" bIns="0" rtlCol="0" anchor="ctr"/>
+          <a:lstStyle/>
+          <a:p>
+            <a:pPr marL="0" indent="0">
+              <a:buNone/>
+            </a:pPr>
+            <a:r>
+              <a:rPr lang="en-US" sz="1000" dirty="0" err="1">
+                <a:solidFill>
+                  <a:srgbClr val="374151"/>
+                </a:solidFill>
+                <a:latin typeface="Calibri" pitchFamily="34" charset="0"/>
+                <a:ea typeface="Calibri" pitchFamily="34" charset="-122"/>
+                <a:cs typeface="Calibri" pitchFamily="34" charset="-120"/>
+              </a:rPr>
+              <a:t>Télécharger</a:t>
+            </a:r>
+            <a:r>
+              <a:rPr lang="en-US" sz="1000" dirty="0">
+                <a:solidFill>
+                  <a:srgbClr val="374151"/>
+                </a:solidFill>
+                <a:latin typeface="Calibri" pitchFamily="34" charset="0"/>
+                <a:ea typeface="Calibri" pitchFamily="34" charset="-122"/>
+                <a:cs typeface="Calibri" pitchFamily="34" charset="-120"/>
+              </a:rPr>
+              <a:t> les </a:t>
+            </a:r>
+            <a:r>
+              <a:rPr lang="en-US" sz="1000" dirty="0" err="1">
+                <a:solidFill>
+                  <a:srgbClr val="374151"/>
+                </a:solidFill>
+                <a:latin typeface="Calibri" pitchFamily="34" charset="0"/>
+                <a:ea typeface="Calibri" pitchFamily="34" charset="-122"/>
+                <a:cs typeface="Calibri" pitchFamily="34" charset="-120"/>
+              </a:rPr>
+              <a:t>fichiers</a:t>
+            </a:r>
+            <a:r>
+              <a:rPr lang="en-US" sz="1000" dirty="0">
+                <a:solidFill>
+                  <a:srgbClr val="374151"/>
+                </a:solidFill>
+                <a:latin typeface="Calibri" pitchFamily="34" charset="0"/>
+                <a:ea typeface="Calibri" pitchFamily="34" charset="-122"/>
+                <a:cs typeface="Calibri" pitchFamily="34" charset="-120"/>
+              </a:rPr>
+              <a:t> de config</a:t>
             </a:r>
             <a:endParaRPr lang="en-US" sz="1000" dirty="0"/>
           </a:p>
@@ -13901,6 +15218,162 @@
           </a:p>
         </p:txBody>
       </p:sp>
+      <p:pic>
+        <p:nvPicPr>
+          <p:cNvPr id="3" name="Image 2">
+            <a:extLst>
+              <a:ext uri="{FF2B5EF4-FFF2-40B4-BE49-F238E27FC236}">
+                <a16:creationId xmlns:a16="http://schemas.microsoft.com/office/drawing/2014/main" id="{E29E771A-51E0-9B48-7423-35ACCBC0530A}"/>
+              </a:ext>
+            </a:extLst>
+          </p:cNvPr>
+          <p:cNvPicPr>
+            <a:picLocks noChangeAspect="1"/>
+          </p:cNvPicPr>
+          <p:nvPr/>
+        </p:nvPicPr>
+        <p:blipFill>
+          <a:blip r:embed="rId3">
+            <a:duotone>
+              <a:prstClr val="black"/>
+              <a:schemeClr val="tx1">
+                <a:tint val="45000"/>
+                <a:satMod val="400000"/>
+              </a:schemeClr>
+            </a:duotone>
+            <a:extLst>
+              <a:ext uri="{BEBA8EAE-BF5A-486C-A8C5-ECC9F3942E4B}">
+                <a14:imgProps xmlns:a14="http://schemas.microsoft.com/office/drawing/2010/main">
+                  <a14:imgLayer r:embed="rId4">
+                    <a14:imgEffect>
+                      <a14:brightnessContrast bright="-100000" contrast="100000"/>
+                    </a14:imgEffect>
+                  </a14:imgLayer>
+                </a14:imgProps>
+              </a:ext>
+            </a:extLst>
+          </a:blip>
+          <a:srcRect t="76759"/>
+          <a:stretch>
+            <a:fillRect/>
+          </a:stretch>
+        </p:blipFill>
+        <p:spPr>
+          <a:xfrm>
+            <a:off x="7340011" y="182880"/>
+            <a:ext cx="1605869" cy="306835"/>
+          </a:xfrm>
+          <a:prstGeom prst="rect">
+            <a:avLst/>
+          </a:prstGeom>
+        </p:spPr>
+      </p:pic>
+      <p:pic>
+        <p:nvPicPr>
+          <p:cNvPr id="30" name="Image 29">
+            <a:extLst>
+              <a:ext uri="{FF2B5EF4-FFF2-40B4-BE49-F238E27FC236}">
+                <a16:creationId xmlns:a16="http://schemas.microsoft.com/office/drawing/2014/main" id="{F384A988-84E2-AE40-54F0-F963D5624F8C}"/>
+              </a:ext>
+            </a:extLst>
+          </p:cNvPr>
+          <p:cNvPicPr>
+            <a:picLocks noChangeAspect="1"/>
+          </p:cNvPicPr>
+          <p:nvPr/>
+        </p:nvPicPr>
+        <p:blipFill>
+          <a:blip r:embed="rId5"/>
+          <a:srcRect l="3479" t="62841" r="18301"/>
+          <a:stretch>
+            <a:fillRect/>
+          </a:stretch>
+        </p:blipFill>
+        <p:spPr>
+          <a:xfrm>
+            <a:off x="2454777" y="1327394"/>
+            <a:ext cx="1888623" cy="684286"/>
+          </a:xfrm>
+          <a:prstGeom prst="rect">
+            <a:avLst/>
+          </a:prstGeom>
+          <a:ln>
+            <a:solidFill>
+              <a:srgbClr val="C7D2FE"/>
+            </a:solidFill>
+          </a:ln>
+        </p:spPr>
+      </p:pic>
+      <p:pic>
+        <p:nvPicPr>
+          <p:cNvPr id="32" name="Image 31">
+            <a:extLst>
+              <a:ext uri="{FF2B5EF4-FFF2-40B4-BE49-F238E27FC236}">
+                <a16:creationId xmlns:a16="http://schemas.microsoft.com/office/drawing/2014/main" id="{5C6BFD55-4946-E91F-8865-2D04B7C3D2C4}"/>
+              </a:ext>
+            </a:extLst>
+          </p:cNvPr>
+          <p:cNvPicPr>
+            <a:picLocks noChangeAspect="1"/>
+          </p:cNvPicPr>
+          <p:nvPr/>
+        </p:nvPicPr>
+        <p:blipFill>
+          <a:blip r:embed="rId6"/>
+          <a:stretch>
+            <a:fillRect/>
+          </a:stretch>
+        </p:blipFill>
+        <p:spPr>
+          <a:xfrm>
+            <a:off x="7158741" y="1546824"/>
+            <a:ext cx="1528059" cy="1914181"/>
+          </a:xfrm>
+          <a:prstGeom prst="rect">
+            <a:avLst/>
+          </a:prstGeom>
+          <a:ln>
+            <a:solidFill>
+              <a:srgbClr val="C7D2FE"/>
+            </a:solidFill>
+          </a:ln>
+        </p:spPr>
+      </p:pic>
+      <p:pic>
+        <p:nvPicPr>
+          <p:cNvPr id="34" name="Image 33">
+            <a:extLst>
+              <a:ext uri="{FF2B5EF4-FFF2-40B4-BE49-F238E27FC236}">
+                <a16:creationId xmlns:a16="http://schemas.microsoft.com/office/drawing/2014/main" id="{76EE1448-3E4D-2C5A-8C65-4554D0658A20}"/>
+              </a:ext>
+            </a:extLst>
+          </p:cNvPr>
+          <p:cNvPicPr>
+            <a:picLocks noChangeAspect="1"/>
+          </p:cNvPicPr>
+          <p:nvPr/>
+        </p:nvPicPr>
+        <p:blipFill>
+          <a:blip r:embed="rId7"/>
+          <a:stretch>
+            <a:fillRect/>
+          </a:stretch>
+        </p:blipFill>
+        <p:spPr>
+          <a:xfrm>
+            <a:off x="7158740" y="3579951"/>
+            <a:ext cx="1528059" cy="504846"/>
+          </a:xfrm>
+          <a:prstGeom prst="rect">
+            <a:avLst/>
+          </a:prstGeom>
+          <a:ln>
+            <a:solidFill>
+              <a:srgbClr val="C7D2FE"/>
+            </a:solidFill>
+          </a:ln>
+        </p:spPr>
+      </p:pic>
     </p:spTree>
   </p:cSld>
   <p:clrMapOvr>
@@ -14428,17 +15901,6 @@
             <a:pPr marL="0" indent="0">
               <a:buNone/>
             </a:pPr>
-            <a:r>
-              <a:rPr lang="en-US" sz="1000" dirty="0">
-                <a:solidFill>
-                  <a:srgbClr val="90A4AE"/>
-                </a:solidFill>
-                <a:latin typeface="Calibri" pitchFamily="34" charset="0"/>
-                <a:ea typeface="Calibri" pitchFamily="34" charset="-122"/>
-                <a:cs typeface="Calibri" pitchFamily="34" charset="-120"/>
-              </a:rPr>
-              <a:t>DH Group</a:t>
-            </a:r>
             <a:endParaRPr lang="en-US" sz="1000" dirty="0"/>
           </a:p>
         </p:txBody>
@@ -14467,17 +15929,6 @@
             <a:pPr marL="0" indent="0">
               <a:buNone/>
             </a:pPr>
-            <a:r>
-              <a:rPr lang="en-US" sz="1000" b="1" dirty="0">
-                <a:solidFill>
-                  <a:srgbClr val="FFFFFF"/>
-                </a:solidFill>
-                <a:latin typeface="Calibri" pitchFamily="34" charset="0"/>
-                <a:ea typeface="Calibri" pitchFamily="34" charset="-122"/>
-                <a:cs typeface="Calibri" pitchFamily="34" charset="-120"/>
-              </a:rPr>
-              <a:t>14 (2048 bits)</a:t>
-            </a:r>
             <a:endParaRPr lang="en-US" sz="1000" dirty="0"/>
           </a:p>
         </p:txBody>
@@ -14506,17 +15957,6 @@
             <a:pPr marL="0" indent="0">
               <a:buNone/>
             </a:pPr>
-            <a:r>
-              <a:rPr lang="en-US" sz="1000" dirty="0">
-                <a:solidFill>
-                  <a:srgbClr val="90A4AE"/>
-                </a:solidFill>
-                <a:latin typeface="Calibri" pitchFamily="34" charset="0"/>
-                <a:ea typeface="Calibri" pitchFamily="34" charset="-122"/>
-                <a:cs typeface="Calibri" pitchFamily="34" charset="-120"/>
-              </a:rPr>
-              <a:t>Lifetime</a:t>
-            </a:r>
             <a:endParaRPr lang="en-US" sz="1000" dirty="0"/>
           </a:p>
         </p:txBody>
@@ -14545,17 +15985,6 @@
             <a:pPr marL="0" indent="0">
               <a:buNone/>
             </a:pPr>
-            <a:r>
-              <a:rPr lang="en-US" sz="1000" b="1" dirty="0">
-                <a:solidFill>
-                  <a:srgbClr val="FFFFFF"/>
-                </a:solidFill>
-                <a:latin typeface="Calibri" pitchFamily="34" charset="0"/>
-                <a:ea typeface="Calibri" pitchFamily="34" charset="-122"/>
-                <a:cs typeface="Calibri" pitchFamily="34" charset="-120"/>
-              </a:rPr>
-              <a:t>28 800 s</a:t>
-            </a:r>
             <a:endParaRPr lang="en-US" sz="1000" dirty="0"/>
           </a:p>
         </p:txBody>
@@ -14976,17 +16405,6 @@
             <a:pPr marL="0" indent="0">
               <a:buNone/>
             </a:pPr>
-            <a:r>
-              <a:rPr lang="en-US" sz="1000" dirty="0">
-                <a:solidFill>
-                  <a:srgbClr val="90A4AE"/>
-                </a:solidFill>
-                <a:latin typeface="Calibri" pitchFamily="34" charset="0"/>
-                <a:ea typeface="Calibri" pitchFamily="34" charset="-122"/>
-                <a:cs typeface="Calibri" pitchFamily="34" charset="-120"/>
-              </a:rPr>
-              <a:t>Chiffrement</a:t>
-            </a:r>
             <a:endParaRPr lang="en-US" sz="1000" dirty="0"/>
           </a:p>
         </p:txBody>
@@ -15015,17 +16433,6 @@
             <a:pPr marL="0" indent="0">
               <a:buNone/>
             </a:pPr>
-            <a:r>
-              <a:rPr lang="en-US" sz="1000" b="1" dirty="0">
-                <a:solidFill>
-                  <a:srgbClr val="FFFFFF"/>
-                </a:solidFill>
-                <a:latin typeface="Calibri" pitchFamily="34" charset="0"/>
-                <a:ea typeface="Calibri" pitchFamily="34" charset="-122"/>
-                <a:cs typeface="Calibri" pitchFamily="34" charset="-120"/>
-              </a:rPr>
-              <a:t>AES-256</a:t>
-            </a:r>
             <a:endParaRPr lang="en-US" sz="1000" dirty="0"/>
           </a:p>
         </p:txBody>
@@ -15054,17 +16461,6 @@
             <a:pPr marL="0" indent="0">
               <a:buNone/>
             </a:pPr>
-            <a:r>
-              <a:rPr lang="en-US" sz="1000" dirty="0">
-                <a:solidFill>
-                  <a:srgbClr val="90A4AE"/>
-                </a:solidFill>
-                <a:latin typeface="Calibri" pitchFamily="34" charset="0"/>
-                <a:ea typeface="Calibri" pitchFamily="34" charset="-122"/>
-                <a:cs typeface="Calibri" pitchFamily="34" charset="-120"/>
-              </a:rPr>
-              <a:t>PFS Group</a:t>
-            </a:r>
             <a:endParaRPr lang="en-US" sz="1000" dirty="0"/>
           </a:p>
         </p:txBody>
@@ -15093,17 +16489,6 @@
             <a:pPr marL="0" indent="0">
               <a:buNone/>
             </a:pPr>
-            <a:r>
-              <a:rPr lang="en-US" sz="1000" b="1" dirty="0">
-                <a:solidFill>
-                  <a:srgbClr val="FFFFFF"/>
-                </a:solidFill>
-                <a:latin typeface="Calibri" pitchFamily="34" charset="0"/>
-                <a:ea typeface="Calibri" pitchFamily="34" charset="-122"/>
-                <a:cs typeface="Calibri" pitchFamily="34" charset="-120"/>
-              </a:rPr>
-              <a:t>14 (2048 bits)</a:t>
-            </a:r>
             <a:endParaRPr lang="en-US" sz="1000" dirty="0"/>
           </a:p>
         </p:txBody>
@@ -15116,8 +16501,8 @@
         </p:nvSpPr>
         <p:spPr>
           <a:xfrm>
-            <a:off x="365760" y="3611880"/>
-            <a:ext cx="8412480" cy="1188720"/>
+            <a:off x="365760" y="3639582"/>
+            <a:ext cx="8412480" cy="1321037"/>
           </a:xfrm>
           <a:prstGeom prst="roundRect">
             <a:avLst>
@@ -15207,7 +16592,7 @@
         </p:nvSpPr>
         <p:spPr>
           <a:xfrm>
-            <a:off x="548640" y="4096512"/>
+            <a:off x="548640" y="4027932"/>
             <a:ext cx="3657600" cy="292608"/>
           </a:xfrm>
           <a:prstGeom prst="rect">
@@ -15232,7 +16617,7 @@
                 <a:ea typeface="Calibri" pitchFamily="34" charset="-122"/>
                 <a:cs typeface="Calibri" pitchFamily="34" charset="-120"/>
               </a:rPr>
-              <a:t>Status → IPSec : ESTABLISHED</a:t>
+              <a:t>Status → IPSec : </a:t>
             </a:r>
             <a:endParaRPr lang="en-US" sz="1100" dirty="0"/>
           </a:p>
@@ -15285,7 +16670,7 @@
         </p:nvSpPr>
         <p:spPr>
           <a:xfrm>
-            <a:off x="4572000" y="4041648"/>
+            <a:off x="4572000" y="3931719"/>
             <a:ext cx="4023360" cy="320040"/>
           </a:xfrm>
           <a:prstGeom prst="rect">
@@ -15310,12 +16695,228 @@
                 <a:ea typeface="Cambria" pitchFamily="34" charset="-122"/>
                 <a:cs typeface="Cambria" pitchFamily="34" charset="-120"/>
               </a:rPr>
-              <a:t>5 paquets · 0% perte · RTT moy. 8ms</a:t>
+              <a:t>5 paquets · 0% </a:t>
+            </a:r>
+            <a:r>
+              <a:rPr lang="en-US" sz="1300" b="1" dirty="0" err="1">
+                <a:solidFill>
+                  <a:srgbClr val="4CAF50"/>
+                </a:solidFill>
+                <a:latin typeface="Cambria" pitchFamily="34" charset="0"/>
+                <a:ea typeface="Cambria" pitchFamily="34" charset="-122"/>
+                <a:cs typeface="Cambria" pitchFamily="34" charset="-120"/>
+              </a:rPr>
+              <a:t>perte</a:t>
+            </a:r>
+            <a:r>
+              <a:rPr lang="en-US" sz="1300" b="1" dirty="0">
+                <a:solidFill>
+                  <a:srgbClr val="4CAF50"/>
+                </a:solidFill>
+                <a:latin typeface="Cambria" pitchFamily="34" charset="0"/>
+                <a:ea typeface="Cambria" pitchFamily="34" charset="-122"/>
+                <a:cs typeface="Cambria" pitchFamily="34" charset="-120"/>
+              </a:rPr>
+              <a:t> </a:t>
             </a:r>
             <a:endParaRPr lang="en-US" sz="1300" dirty="0"/>
           </a:p>
         </p:txBody>
       </p:sp>
+      <p:pic>
+        <p:nvPicPr>
+          <p:cNvPr id="3" name="Image 2">
+            <a:extLst>
+              <a:ext uri="{FF2B5EF4-FFF2-40B4-BE49-F238E27FC236}">
+                <a16:creationId xmlns:a16="http://schemas.microsoft.com/office/drawing/2014/main" id="{C4EEA595-7114-739A-B7CD-600714548927}"/>
+              </a:ext>
+            </a:extLst>
+          </p:cNvPr>
+          <p:cNvPicPr>
+            <a:picLocks noChangeAspect="1"/>
+          </p:cNvPicPr>
+          <p:nvPr/>
+        </p:nvPicPr>
+        <p:blipFill>
+          <a:blip r:embed="rId3">
+            <a:duotone>
+              <a:prstClr val="black"/>
+              <a:schemeClr val="tx1">
+                <a:tint val="45000"/>
+                <a:satMod val="400000"/>
+              </a:schemeClr>
+            </a:duotone>
+            <a:extLst>
+              <a:ext uri="{BEBA8EAE-BF5A-486C-A8C5-ECC9F3942E4B}">
+                <a14:imgProps xmlns:a14="http://schemas.microsoft.com/office/drawing/2010/main">
+                  <a14:imgLayer r:embed="rId4">
+                    <a14:imgEffect>
+                      <a14:brightnessContrast bright="2000"/>
+                    </a14:imgEffect>
+                  </a14:imgLayer>
+                </a14:imgProps>
+              </a:ext>
+            </a:extLst>
+          </a:blip>
+          <a:srcRect t="76759"/>
+          <a:stretch>
+            <a:fillRect/>
+          </a:stretch>
+        </p:blipFill>
+        <p:spPr>
+          <a:xfrm>
+            <a:off x="7340011" y="182880"/>
+            <a:ext cx="1605869" cy="306835"/>
+          </a:xfrm>
+          <a:prstGeom prst="rect">
+            <a:avLst/>
+          </a:prstGeom>
+        </p:spPr>
+      </p:pic>
+      <p:pic>
+        <p:nvPicPr>
+          <p:cNvPr id="39" name="Image 38">
+            <a:extLst>
+              <a:ext uri="{FF2B5EF4-FFF2-40B4-BE49-F238E27FC236}">
+                <a16:creationId xmlns:a16="http://schemas.microsoft.com/office/drawing/2014/main" id="{13F4ACE2-C732-7720-814C-72463B4B2AA1}"/>
+              </a:ext>
+            </a:extLst>
+          </p:cNvPr>
+          <p:cNvPicPr>
+            <a:picLocks noChangeAspect="1"/>
+          </p:cNvPicPr>
+          <p:nvPr/>
+        </p:nvPicPr>
+        <p:blipFill>
+          <a:blip r:embed="rId5"/>
+          <a:srcRect t="872" b="47455"/>
+          <a:stretch>
+            <a:fillRect/>
+          </a:stretch>
+        </p:blipFill>
+        <p:spPr>
+          <a:xfrm>
+            <a:off x="480060" y="2798607"/>
+            <a:ext cx="3794760" cy="529265"/>
+          </a:xfrm>
+          <a:prstGeom prst="rect">
+            <a:avLst/>
+          </a:prstGeom>
+          <a:ln>
+            <a:solidFill>
+              <a:srgbClr val="C7D2FE"/>
+            </a:solidFill>
+          </a:ln>
+        </p:spPr>
+      </p:pic>
+      <p:pic>
+        <p:nvPicPr>
+          <p:cNvPr id="40" name="Image 39">
+            <a:extLst>
+              <a:ext uri="{FF2B5EF4-FFF2-40B4-BE49-F238E27FC236}">
+                <a16:creationId xmlns:a16="http://schemas.microsoft.com/office/drawing/2014/main" id="{9564A95A-C332-BFFA-3918-165D57A319A8}"/>
+              </a:ext>
+            </a:extLst>
+          </p:cNvPr>
+          <p:cNvPicPr>
+            <a:picLocks noChangeAspect="1"/>
+          </p:cNvPicPr>
+          <p:nvPr/>
+        </p:nvPicPr>
+        <p:blipFill>
+          <a:blip r:embed="rId5"/>
+          <a:srcRect l="7430" t="53841" b="836"/>
+          <a:stretch>
+            <a:fillRect/>
+          </a:stretch>
+        </p:blipFill>
+        <p:spPr>
+          <a:xfrm>
+            <a:off x="4667250" y="2807208"/>
+            <a:ext cx="4039762" cy="533867"/>
+          </a:xfrm>
+          <a:prstGeom prst="rect">
+            <a:avLst/>
+          </a:prstGeom>
+          <a:ln>
+            <a:solidFill>
+              <a:srgbClr val="439ED4"/>
+            </a:solidFill>
+          </a:ln>
+        </p:spPr>
+      </p:pic>
+      <p:pic>
+        <p:nvPicPr>
+          <p:cNvPr id="46" name="Image 45">
+            <a:extLst>
+              <a:ext uri="{FF2B5EF4-FFF2-40B4-BE49-F238E27FC236}">
+                <a16:creationId xmlns:a16="http://schemas.microsoft.com/office/drawing/2014/main" id="{1B7221F7-C546-353B-CB00-F4555DBF691E}"/>
+              </a:ext>
+            </a:extLst>
+          </p:cNvPr>
+          <p:cNvPicPr>
+            <a:picLocks noChangeAspect="1"/>
+          </p:cNvPicPr>
+          <p:nvPr/>
+        </p:nvPicPr>
+        <p:blipFill>
+          <a:blip r:embed="rId6"/>
+          <a:srcRect l="27139" t="30671" r="34664" b="58756"/>
+          <a:stretch>
+            <a:fillRect/>
+          </a:stretch>
+        </p:blipFill>
+        <p:spPr>
+          <a:xfrm>
+            <a:off x="4572000" y="4226982"/>
+            <a:ext cx="2677887" cy="543819"/>
+          </a:xfrm>
+          <a:prstGeom prst="rect">
+            <a:avLst/>
+          </a:prstGeom>
+          <a:ln>
+            <a:solidFill>
+              <a:srgbClr val="46A34A"/>
+            </a:solidFill>
+          </a:ln>
+        </p:spPr>
+      </p:pic>
+      <p:pic>
+        <p:nvPicPr>
+          <p:cNvPr id="48" name="Image 47">
+            <a:extLst>
+              <a:ext uri="{FF2B5EF4-FFF2-40B4-BE49-F238E27FC236}">
+                <a16:creationId xmlns:a16="http://schemas.microsoft.com/office/drawing/2014/main" id="{81501C03-956D-F9A2-D6CC-32B56572AE7B}"/>
+              </a:ext>
+            </a:extLst>
+          </p:cNvPr>
+          <p:cNvPicPr>
+            <a:picLocks noChangeAspect="1"/>
+          </p:cNvPicPr>
+          <p:nvPr/>
+        </p:nvPicPr>
+        <p:blipFill>
+          <a:blip r:embed="rId7"/>
+          <a:srcRect l="82376" t="43729" r="2772" b="46776"/>
+          <a:stretch>
+            <a:fillRect/>
+          </a:stretch>
+        </p:blipFill>
+        <p:spPr>
+          <a:xfrm>
+            <a:off x="548640" y="4300100"/>
+            <a:ext cx="1069648" cy="488348"/>
+          </a:xfrm>
+          <a:prstGeom prst="rect">
+            <a:avLst/>
+          </a:prstGeom>
+          <a:ln>
+            <a:solidFill>
+              <a:srgbClr val="46A34A"/>
+            </a:solidFill>
+          </a:ln>
+        </p:spPr>
+      </p:pic>
     </p:spTree>
   </p:cSld>
   <p:clrMapOvr>
@@ -16313,17 +17914,6 @@
             <a:pPr marL="0" indent="0">
               <a:buNone/>
             </a:pPr>
-            <a:r>
-              <a:rPr lang="en-US" sz="1000" b="1" dirty="0">
-                <a:solidFill>
-                  <a:srgbClr val="1E2761"/>
-                </a:solidFill>
-                <a:latin typeface="Calibri" pitchFamily="34" charset="0"/>
-                <a:ea typeface="Calibri" pitchFamily="34" charset="-122"/>
-                <a:cs typeface="Calibri" pitchFamily="34" charset="-120"/>
-              </a:rPr>
-              <a:t>Auth :</a:t>
-            </a:r>
             <a:endParaRPr lang="en-US" sz="1000" dirty="0"/>
           </a:p>
         </p:txBody>
@@ -16352,17 +17942,6 @@
             <a:pPr marL="0" indent="0">
               <a:buNone/>
             </a:pPr>
-            <a:r>
-              <a:rPr lang="en-US" sz="1000" dirty="0">
-                <a:solidFill>
-                  <a:srgbClr val="374151"/>
-                </a:solidFill>
-                <a:latin typeface="Calibri" pitchFamily="34" charset="0"/>
-                <a:ea typeface="Calibri" pitchFamily="34" charset="-122"/>
-                <a:cs typeface="Calibri" pitchFamily="34" charset="-120"/>
-              </a:rPr>
-              <a:t>Certificats X.509 + login</a:t>
-            </a:r>
             <a:endParaRPr lang="en-US" sz="1000" dirty="0"/>
           </a:p>
         </p:txBody>
@@ -16518,6 +18097,56 @@
           </a:p>
         </p:txBody>
       </p:sp>
+      <p:pic>
+        <p:nvPicPr>
+          <p:cNvPr id="3" name="Image 2">
+            <a:extLst>
+              <a:ext uri="{FF2B5EF4-FFF2-40B4-BE49-F238E27FC236}">
+                <a16:creationId xmlns:a16="http://schemas.microsoft.com/office/drawing/2014/main" id="{943B1157-2418-0024-9C73-BFA2ED98DD09}"/>
+              </a:ext>
+            </a:extLst>
+          </p:cNvPr>
+          <p:cNvPicPr>
+            <a:picLocks noChangeAspect="1"/>
+          </p:cNvPicPr>
+          <p:nvPr/>
+        </p:nvPicPr>
+        <p:blipFill>
+          <a:blip r:embed="rId3">
+            <a:duotone>
+              <a:prstClr val="black"/>
+              <a:schemeClr val="tx1">
+                <a:tint val="45000"/>
+                <a:satMod val="400000"/>
+              </a:schemeClr>
+            </a:duotone>
+            <a:extLst>
+              <a:ext uri="{BEBA8EAE-BF5A-486C-A8C5-ECC9F3942E4B}">
+                <a14:imgProps xmlns:a14="http://schemas.microsoft.com/office/drawing/2010/main">
+                  <a14:imgLayer r:embed="rId4">
+                    <a14:imgEffect>
+                      <a14:brightnessContrast bright="-100000" contrast="100000"/>
+                    </a14:imgEffect>
+                  </a14:imgLayer>
+                </a14:imgProps>
+              </a:ext>
+            </a:extLst>
+          </a:blip>
+          <a:srcRect t="76759"/>
+          <a:stretch>
+            <a:fillRect/>
+          </a:stretch>
+        </p:blipFill>
+        <p:spPr>
+          <a:xfrm>
+            <a:off x="7340011" y="182880"/>
+            <a:ext cx="1605869" cy="306835"/>
+          </a:xfrm>
+          <a:prstGeom prst="rect">
+            <a:avLst/>
+          </a:prstGeom>
+        </p:spPr>
+      </p:pic>
     </p:spTree>
   </p:cSld>
   <p:clrMapOvr>
